--- a/chapter1/clips/clip-07-dataset-management/clip.pptx
+++ b/chapter1/clips/clip-07-dataset-management/clip.pptx
@@ -12,7 +12,6 @@
     <p:sldId id="260" r:id="rId11"/>
     <p:sldId id="261" r:id="rId12"/>
     <p:sldId id="262" r:id="rId13"/>
-    <p:sldId id="263" r:id="rId14"/>
   </p:sldIdLst>
   <p:sldSz cx="12191695" cy="6858000" type="screen4x3"/>
   <p:notesSz cx="6858000" cy="9144000"/>
@@ -3103,8 +3102,8 @@
         </p:nvSpPr>
         <p:spPr>
           <a:xfrm>
-            <a:off x="548640" y="320040"/>
-            <a:ext cx="11064240" cy="914400"/>
+            <a:off x="548640" y="1828800"/>
+            <a:ext cx="11064240" cy="2743200"/>
           </a:xfrm>
           <a:prstGeom prst="rect">
             <a:avLst/>
@@ -3112,16 +3111,46 @@
           <a:noFill/>
         </p:spPr>
         <p:txBody>
-          <a:bodyPr wrap="none">
-            <a:spAutoFit/>
+          <a:bodyPr wrap="square">
+            <a:noAutofit/>
           </a:bodyPr>
           <a:lstStyle/>
           <a:p>
-            <a:pPr>
-              <a:defRPr sz="3200" b="1"/>
+            <a:pPr algn="ctr">
+              <a:lnSpc>
+                <a:spcPts val="2200"/>
+              </a:lnSpc>
+              <a:spcAft>
+                <a:spcPts val="400"/>
+              </a:spcAft>
             </a:pPr>
             <a:r>
+              <a:rPr sz="4000" b="1">
+                <a:solidFill>
+                  <a:srgbClr val="1A1A2E"/>
+                </a:solidFill>
+                <a:latin typeface="Calibri"/>
+              </a:rPr>
               <a:t>Chapter 1 — Dataset management</a:t>
+            </a:r>
+          </a:p>
+          <a:p>
+            <a:pPr algn="ctr">
+              <a:lnSpc>
+                <a:spcPts val="2200"/>
+              </a:lnSpc>
+              <a:spcBef>
+                <a:spcPts val="1400"/>
+              </a:spcBef>
+            </a:pPr>
+            <a:r>
+              <a:rPr sz="2600" b="0">
+                <a:solidFill>
+                  <a:srgbClr val="333333"/>
+                </a:solidFill>
+                <a:latin typeface="Calibri"/>
+              </a:rPr>
+              <a:t>Keep datasets trustworthy as they are stored, shared, and reused</a:t>
             </a:r>
           </a:p>
         </p:txBody>
@@ -3134,8 +3163,8 @@
         </p:nvSpPr>
         <p:spPr>
           <a:xfrm>
-            <a:off x="731520" y="1280160"/>
-            <a:ext cx="10515600" cy="5029200"/>
+            <a:off x="548640" y="6355080"/>
+            <a:ext cx="11064240" cy="320040"/>
           </a:xfrm>
           <a:prstGeom prst="rect">
             <a:avLst/>
@@ -3144,15 +3173,23 @@
         </p:spPr>
         <p:txBody>
           <a:bodyPr wrap="square">
-            <a:spAutoFit/>
+            <a:noAutofit/>
           </a:bodyPr>
           <a:lstStyle/>
           <a:p>
-            <a:pPr>
-              <a:defRPr sz="2000"/>
+            <a:pPr algn="r">
+              <a:lnSpc>
+                <a:spcPts val="2200"/>
+              </a:lnSpc>
+              <a:defRPr sz="1000" b="0">
+                <a:solidFill>
+                  <a:srgbClr val="666666"/>
+                </a:solidFill>
+                <a:latin typeface="Calibri"/>
+              </a:defRPr>
             </a:pPr>
             <a:r>
-              <a:t>Keep datasets trustworthy as they are stored, shared, and reused</a:t>
+              <a:t>Chapter 1 — Dataset Management</a:t>
             </a:r>
           </a:p>
         </p:txBody>
@@ -3183,8 +3220,8 @@
         </p:nvSpPr>
         <p:spPr>
           <a:xfrm>
-            <a:off x="548640" y="320040"/>
-            <a:ext cx="11064240" cy="914400"/>
+            <a:off x="548640" y="411480"/>
+            <a:ext cx="11064240" cy="777240"/>
           </a:xfrm>
           <a:prstGeom prst="rect">
             <a:avLst/>
@@ -3192,15 +3229,23 @@
           <a:noFill/>
         </p:spPr>
         <p:txBody>
-          <a:bodyPr wrap="none">
-            <a:spAutoFit/>
+          <a:bodyPr wrap="square">
+            <a:noAutofit/>
           </a:bodyPr>
           <a:lstStyle/>
           <a:p>
             <a:pPr>
-              <a:defRPr sz="3200" b="1"/>
+              <a:lnSpc>
+                <a:spcPts val="2200"/>
+              </a:lnSpc>
             </a:pPr>
             <a:r>
+              <a:rPr sz="2800" b="1">
+                <a:solidFill>
+                  <a:srgbClr val="1A1A2E"/>
+                </a:solidFill>
+                <a:latin typeface="Calibri"/>
+              </a:rPr>
               <a:t>Learning objectives</a:t>
             </a:r>
           </a:p>
@@ -3214,8 +3259,8 @@
         </p:nvSpPr>
         <p:spPr>
           <a:xfrm>
-            <a:off x="731520" y="1280160"/>
-            <a:ext cx="10515600" cy="5029200"/>
+            <a:off x="548640" y="1234440"/>
+            <a:ext cx="11064240" cy="4937760"/>
           </a:xfrm>
           <a:prstGeom prst="rect">
             <a:avLst/>
@@ -3224,31 +3269,141 @@
         </p:spPr>
         <p:txBody>
           <a:bodyPr wrap="square">
-            <a:spAutoFit/>
+            <a:noAutofit/>
           </a:bodyPr>
           <a:lstStyle/>
           <a:p>
             <a:pPr>
-              <a:defRPr sz="2000"/>
+              <a:lnSpc>
+                <a:spcPts val="2200"/>
+              </a:lnSpc>
+              <a:spcAft>
+                <a:spcPts val="1000"/>
+              </a:spcAft>
             </a:pPr>
             <a:r>
-              <a:t>Explain why management matters after models ship</a:t>
+              <a:rPr sz="2000" b="0">
+                <a:solidFill>
+                  <a:srgbClr val="333333"/>
+                </a:solidFill>
+                <a:latin typeface="Calibri"/>
+              </a:rPr>
+              <a:t>• Explain why management matters after models ship</a:t>
             </a:r>
           </a:p>
           <a:p>
             <a:pPr>
-              <a:defRPr sz="2000"/>
+              <a:lnSpc>
+                <a:spcPts val="2200"/>
+              </a:lnSpc>
+              <a:spcAft>
+                <a:spcPts val="1000"/>
+              </a:spcAft>
             </a:pPr>
             <a:r>
-              <a:t>List core management practices (versioning, metadata, access, catalog)</a:t>
+              <a:rPr sz="2000" b="0">
+                <a:solidFill>
+                  <a:srgbClr val="333333"/>
+                </a:solidFill>
+                <a:latin typeface="Calibri"/>
+              </a:rPr>
+              <a:t>• List core management practices (versioning,</a:t>
             </a:r>
           </a:p>
           <a:p>
             <a:pPr>
-              <a:defRPr sz="2000"/>
+              <a:lnSpc>
+                <a:spcPts val="2200"/>
+              </a:lnSpc>
+              <a:spcAft>
+                <a:spcPts val="1000"/>
+              </a:spcAft>
             </a:pPr>
             <a:r>
-              <a:t>Name privacy and security controls that protect sensitive tables</a:t>
+              <a:rPr sz="2000" b="0">
+                <a:solidFill>
+                  <a:srgbClr val="333333"/>
+                </a:solidFill>
+                <a:latin typeface="Calibri"/>
+              </a:rPr>
+              <a:t>      metadata, access, catalog)</a:t>
+            </a:r>
+          </a:p>
+          <a:p>
+            <a:pPr>
+              <a:lnSpc>
+                <a:spcPts val="2200"/>
+              </a:lnSpc>
+              <a:spcAft>
+                <a:spcPts val="1000"/>
+              </a:spcAft>
+            </a:pPr>
+            <a:r>
+              <a:rPr sz="2000" b="0">
+                <a:solidFill>
+                  <a:srgbClr val="333333"/>
+                </a:solidFill>
+                <a:latin typeface="Calibri"/>
+              </a:rPr>
+              <a:t>• Name privacy and security controls that protect</a:t>
+            </a:r>
+          </a:p>
+          <a:p>
+            <a:pPr>
+              <a:lnSpc>
+                <a:spcPts val="2200"/>
+              </a:lnSpc>
+              <a:spcAft>
+                <a:spcPts val="1000"/>
+              </a:spcAft>
+            </a:pPr>
+            <a:r>
+              <a:rPr sz="2000" b="0">
+                <a:solidFill>
+                  <a:srgbClr val="333333"/>
+                </a:solidFill>
+                <a:latin typeface="Calibri"/>
+              </a:rPr>
+              <a:t>      sensitive tables</a:t>
+            </a:r>
+          </a:p>
+        </p:txBody>
+      </p:sp>
+      <p:sp>
+        <p:nvSpPr>
+          <p:cNvPr id="4" name="TextBox 3"/>
+          <p:cNvSpPr txBox="1"/>
+          <p:nvPr/>
+        </p:nvSpPr>
+        <p:spPr>
+          <a:xfrm>
+            <a:off x="548640" y="6355080"/>
+            <a:ext cx="11064240" cy="320040"/>
+          </a:xfrm>
+          <a:prstGeom prst="rect">
+            <a:avLst/>
+          </a:prstGeom>
+          <a:noFill/>
+        </p:spPr>
+        <p:txBody>
+          <a:bodyPr wrap="square">
+            <a:noAutofit/>
+          </a:bodyPr>
+          <a:lstStyle/>
+          <a:p>
+            <a:pPr algn="r">
+              <a:lnSpc>
+                <a:spcPts val="2200"/>
+              </a:lnSpc>
+              <a:defRPr sz="1000" b="0">
+                <a:solidFill>
+                  <a:srgbClr val="666666"/>
+                </a:solidFill>
+                <a:latin typeface="Calibri"/>
+              </a:defRPr>
+            </a:pPr>
+            <a:r>
+              <a:t>Chapter 1 — Dataset Management</a:t>
             </a:r>
           </a:p>
         </p:txBody>
@@ -3279,8 +3434,8 @@
         </p:nvSpPr>
         <p:spPr>
           <a:xfrm>
-            <a:off x="548640" y="320040"/>
-            <a:ext cx="11064240" cy="914400"/>
+            <a:off x="548640" y="411480"/>
+            <a:ext cx="11064240" cy="777240"/>
           </a:xfrm>
           <a:prstGeom prst="rect">
             <a:avLst/>
@@ -3288,15 +3443,23 @@
           <a:noFill/>
         </p:spPr>
         <p:txBody>
-          <a:bodyPr wrap="none">
-            <a:spAutoFit/>
+          <a:bodyPr wrap="square">
+            <a:noAutofit/>
           </a:bodyPr>
           <a:lstStyle/>
           <a:p>
             <a:pPr>
-              <a:defRPr sz="3200" b="1"/>
+              <a:lnSpc>
+                <a:spcPts val="2200"/>
+              </a:lnSpc>
             </a:pPr>
             <a:r>
+              <a:rPr sz="2800" b="1">
+                <a:solidFill>
+                  <a:srgbClr val="1A1A2E"/>
+                </a:solidFill>
+                <a:latin typeface="Calibri"/>
+              </a:rPr>
               <a:t>Why management matters</a:t>
             </a:r>
           </a:p>
@@ -3310,8 +3473,8 @@
         </p:nvSpPr>
         <p:spPr>
           <a:xfrm>
-            <a:off x="731520" y="1280160"/>
-            <a:ext cx="10515600" cy="5029200"/>
+            <a:off x="548640" y="1234440"/>
+            <a:ext cx="11064240" cy="4937760"/>
           </a:xfrm>
           <a:prstGeom prst="rect">
             <a:avLst/>
@@ -3320,39 +3483,141 @@
         </p:spPr>
         <p:txBody>
           <a:bodyPr wrap="square">
-            <a:spAutoFit/>
+            <a:noAutofit/>
           </a:bodyPr>
           <a:lstStyle/>
           <a:p>
             <a:pPr>
-              <a:defRPr sz="2000"/>
+              <a:lnSpc>
+                <a:spcPts val="2200"/>
+              </a:lnSpc>
+              <a:spcAft>
+                <a:spcPts val="1000"/>
+              </a:spcAft>
             </a:pPr>
             <a:r>
-              <a:t>Quiet work: access, versions, backups, retention</a:t>
+              <a:rPr sz="2000" b="0">
+                <a:solidFill>
+                  <a:srgbClr val="333333"/>
+                </a:solidFill>
+                <a:latin typeface="Calibri"/>
+              </a:rPr>
+              <a:t>• Quiet work: access, versions, backups, retention</a:t>
             </a:r>
           </a:p>
           <a:p>
             <a:pPr>
-              <a:defRPr sz="2000"/>
+              <a:lnSpc>
+                <a:spcPts val="2200"/>
+              </a:lnSpc>
+              <a:spcAft>
+                <a:spcPts val="1000"/>
+              </a:spcAft>
             </a:pPr>
             <a:r>
-              <a:t>Traceability for audits and collaboration</a:t>
+              <a:rPr sz="2000" b="0">
+                <a:solidFill>
+                  <a:srgbClr val="333333"/>
+                </a:solidFill>
+                <a:latin typeface="Calibri"/>
+              </a:rPr>
+              <a:t>• Traceability for audits and collaboration</a:t>
             </a:r>
           </a:p>
           <a:p>
             <a:pPr>
-              <a:defRPr sz="2000"/>
+              <a:lnSpc>
+                <a:spcPts val="2200"/>
+              </a:lnSpc>
+              <a:spcAft>
+                <a:spcPts val="1000"/>
+              </a:spcAft>
             </a:pPr>
             <a:r>
-              <a:t>Prevents undocumented preprocessing from poisoning models</a:t>
+              <a:rPr sz="2000" b="0">
+                <a:solidFill>
+                  <a:srgbClr val="333333"/>
+                </a:solidFill>
+                <a:latin typeface="Calibri"/>
+              </a:rPr>
+              <a:t>• Prevents undocumented preprocessing from poisoning</a:t>
             </a:r>
           </a:p>
           <a:p>
             <a:pPr>
-              <a:defRPr sz="2000"/>
+              <a:lnSpc>
+                <a:spcPts val="2200"/>
+              </a:lnSpc>
+              <a:spcAft>
+                <a:spcPts val="1000"/>
+              </a:spcAft>
             </a:pPr>
             <a:r>
-              <a:t>Protects the investment in collection and quality</a:t>
+              <a:rPr sz="2000" b="0">
+                <a:solidFill>
+                  <a:srgbClr val="333333"/>
+                </a:solidFill>
+                <a:latin typeface="Calibri"/>
+              </a:rPr>
+              <a:t>      models</a:t>
+            </a:r>
+          </a:p>
+          <a:p>
+            <a:pPr>
+              <a:lnSpc>
+                <a:spcPts val="2200"/>
+              </a:lnSpc>
+              <a:spcAft>
+                <a:spcPts val="1000"/>
+              </a:spcAft>
+            </a:pPr>
+            <a:r>
+              <a:rPr sz="2000" b="0">
+                <a:solidFill>
+                  <a:srgbClr val="333333"/>
+                </a:solidFill>
+                <a:latin typeface="Calibri"/>
+              </a:rPr>
+              <a:t>• Protects the investment in collection and quality</a:t>
+            </a:r>
+          </a:p>
+        </p:txBody>
+      </p:sp>
+      <p:sp>
+        <p:nvSpPr>
+          <p:cNvPr id="4" name="TextBox 3"/>
+          <p:cNvSpPr txBox="1"/>
+          <p:nvPr/>
+        </p:nvSpPr>
+        <p:spPr>
+          <a:xfrm>
+            <a:off x="548640" y="6355080"/>
+            <a:ext cx="11064240" cy="320040"/>
+          </a:xfrm>
+          <a:prstGeom prst="rect">
+            <a:avLst/>
+          </a:prstGeom>
+          <a:noFill/>
+        </p:spPr>
+        <p:txBody>
+          <a:bodyPr wrap="square">
+            <a:noAutofit/>
+          </a:bodyPr>
+          <a:lstStyle/>
+          <a:p>
+            <a:pPr algn="r">
+              <a:lnSpc>
+                <a:spcPts val="2200"/>
+              </a:lnSpc>
+              <a:defRPr sz="1000" b="0">
+                <a:solidFill>
+                  <a:srgbClr val="666666"/>
+                </a:solidFill>
+                <a:latin typeface="Calibri"/>
+              </a:defRPr>
+            </a:pPr>
+            <a:r>
+              <a:t>Chapter 1 — Dataset Management</a:t>
             </a:r>
           </a:p>
         </p:txBody>
@@ -3383,8 +3648,8 @@
         </p:nvSpPr>
         <p:spPr>
           <a:xfrm>
-            <a:off x="548640" y="320040"/>
-            <a:ext cx="11064240" cy="914400"/>
+            <a:off x="548640" y="411480"/>
+            <a:ext cx="11064240" cy="777240"/>
           </a:xfrm>
           <a:prstGeom prst="rect">
             <a:avLst/>
@@ -3392,15 +3657,23 @@
           <a:noFill/>
         </p:spPr>
         <p:txBody>
-          <a:bodyPr wrap="none">
-            <a:spAutoFit/>
+          <a:bodyPr wrap="square">
+            <a:noAutofit/>
           </a:bodyPr>
           <a:lstStyle/>
           <a:p>
             <a:pPr>
-              <a:defRPr sz="3200" b="1"/>
+              <a:lnSpc>
+                <a:spcPts val="2200"/>
+              </a:lnSpc>
             </a:pPr>
             <a:r>
+              <a:rPr sz="2800" b="1">
+                <a:solidFill>
+                  <a:srgbClr val="1A1A2E"/>
+                </a:solidFill>
+                <a:latin typeface="Calibri"/>
+              </a:rPr>
               <a:t>Best practices (overview)</a:t>
             </a:r>
           </a:p>
@@ -3414,8 +3687,8 @@
         </p:nvSpPr>
         <p:spPr>
           <a:xfrm>
-            <a:off x="731520" y="1280160"/>
-            <a:ext cx="10515600" cy="5029200"/>
+            <a:off x="548640" y="1234440"/>
+            <a:ext cx="11064240" cy="4937760"/>
           </a:xfrm>
           <a:prstGeom prst="rect">
             <a:avLst/>
@@ -3424,39 +3697,122 @@
         </p:spPr>
         <p:txBody>
           <a:bodyPr wrap="square">
-            <a:spAutoFit/>
+            <a:noAutofit/>
           </a:bodyPr>
           <a:lstStyle/>
           <a:p>
             <a:pPr>
-              <a:defRPr sz="2000"/>
+              <a:lnSpc>
+                <a:spcPts val="2200"/>
+              </a:lnSpc>
+              <a:spcAft>
+                <a:spcPts val="1000"/>
+              </a:spcAft>
             </a:pPr>
             <a:r>
-              <a:t>Version control for evolving extracts</a:t>
+              <a:rPr sz="2000" b="0">
+                <a:solidFill>
+                  <a:srgbClr val="333333"/>
+                </a:solidFill>
+                <a:latin typeface="Calibri"/>
+              </a:rPr>
+              <a:t>• Version control for evolving extracts</a:t>
             </a:r>
           </a:p>
           <a:p>
             <a:pPr>
-              <a:defRPr sz="2000"/>
+              <a:lnSpc>
+                <a:spcPts val="2200"/>
+              </a:lnSpc>
+              <a:spcAft>
+                <a:spcPts val="1000"/>
+              </a:spcAft>
             </a:pPr>
             <a:r>
-              <a:t>Cleaning and transformation with clear schemas</a:t>
+              <a:rPr sz="2000" b="0">
+                <a:solidFill>
+                  <a:srgbClr val="333333"/>
+                </a:solidFill>
+                <a:latin typeface="Calibri"/>
+              </a:rPr>
+              <a:t>• Cleaning and transformation with clear schemas</a:t>
             </a:r>
           </a:p>
           <a:p>
             <a:pPr>
-              <a:defRPr sz="2000"/>
+              <a:lnSpc>
+                <a:spcPts val="2200"/>
+              </a:lnSpc>
+              <a:spcAft>
+                <a:spcPts val="1000"/>
+              </a:spcAft>
             </a:pPr>
             <a:r>
-              <a:t>Metadata documentation and data catalogs</a:t>
+              <a:rPr sz="2000" b="0">
+                <a:solidFill>
+                  <a:srgbClr val="333333"/>
+                </a:solidFill>
+                <a:latin typeface="Calibri"/>
+              </a:rPr>
+              <a:t>• Metadata documentation and data catalogs</a:t>
             </a:r>
           </a:p>
           <a:p>
             <a:pPr>
-              <a:defRPr sz="2000"/>
+              <a:lnSpc>
+                <a:spcPts val="2200"/>
+              </a:lnSpc>
+              <a:spcAft>
+                <a:spcPts val="1000"/>
+              </a:spcAft>
             </a:pPr>
             <a:r>
-              <a:t>Storage, backups, and role-based access control</a:t>
+              <a:rPr sz="2000" b="0">
+                <a:solidFill>
+                  <a:srgbClr val="333333"/>
+                </a:solidFill>
+                <a:latin typeface="Calibri"/>
+              </a:rPr>
+              <a:t>• Storage, backups, and role-based access control</a:t>
+            </a:r>
+          </a:p>
+        </p:txBody>
+      </p:sp>
+      <p:sp>
+        <p:nvSpPr>
+          <p:cNvPr id="4" name="TextBox 3"/>
+          <p:cNvSpPr txBox="1"/>
+          <p:nvPr/>
+        </p:nvSpPr>
+        <p:spPr>
+          <a:xfrm>
+            <a:off x="548640" y="6355080"/>
+            <a:ext cx="11064240" cy="320040"/>
+          </a:xfrm>
+          <a:prstGeom prst="rect">
+            <a:avLst/>
+          </a:prstGeom>
+          <a:noFill/>
+        </p:spPr>
+        <p:txBody>
+          <a:bodyPr wrap="square">
+            <a:noAutofit/>
+          </a:bodyPr>
+          <a:lstStyle/>
+          <a:p>
+            <a:pPr algn="r">
+              <a:lnSpc>
+                <a:spcPts val="2200"/>
+              </a:lnSpc>
+              <a:defRPr sz="1000" b="0">
+                <a:solidFill>
+                  <a:srgbClr val="666666"/>
+                </a:solidFill>
+                <a:latin typeface="Calibri"/>
+              </a:defRPr>
+            </a:pPr>
+            <a:r>
+              <a:t>Chapter 1 — Dataset Management</a:t>
             </a:r>
           </a:p>
         </p:txBody>
@@ -3487,8 +3843,8 @@
         </p:nvSpPr>
         <p:spPr>
           <a:xfrm>
-            <a:off x="548640" y="320040"/>
-            <a:ext cx="11064240" cy="914400"/>
+            <a:off x="548640" y="411480"/>
+            <a:ext cx="11064240" cy="777240"/>
           </a:xfrm>
           <a:prstGeom prst="rect">
             <a:avLst/>
@@ -3496,15 +3852,23 @@
           <a:noFill/>
         </p:spPr>
         <p:txBody>
-          <a:bodyPr wrap="none">
-            <a:spAutoFit/>
+          <a:bodyPr wrap="square">
+            <a:noAutofit/>
           </a:bodyPr>
           <a:lstStyle/>
           <a:p>
             <a:pPr>
-              <a:defRPr sz="3200" b="1"/>
+              <a:lnSpc>
+                <a:spcPts val="2200"/>
+              </a:lnSpc>
             </a:pPr>
             <a:r>
+              <a:rPr sz="2800" b="1">
+                <a:solidFill>
+                  <a:srgbClr val="1A1A2E"/>
+                </a:solidFill>
+                <a:latin typeface="Calibri"/>
+              </a:rPr>
               <a:t>Privacy and security</a:t>
             </a:r>
           </a:p>
@@ -3518,8 +3882,8 @@
         </p:nvSpPr>
         <p:spPr>
           <a:xfrm>
-            <a:off x="731520" y="1280160"/>
-            <a:ext cx="10515600" cy="5029200"/>
+            <a:off x="548640" y="1234440"/>
+            <a:ext cx="11064240" cy="4937760"/>
           </a:xfrm>
           <a:prstGeom prst="rect">
             <a:avLst/>
@@ -3528,39 +3892,122 @@
         </p:spPr>
         <p:txBody>
           <a:bodyPr wrap="square">
-            <a:spAutoFit/>
+            <a:noAutofit/>
           </a:bodyPr>
           <a:lstStyle/>
           <a:p>
             <a:pPr>
-              <a:defRPr sz="2000"/>
+              <a:lnSpc>
+                <a:spcPts val="2200"/>
+              </a:lnSpc>
+              <a:spcAft>
+                <a:spcPts val="1000"/>
+              </a:spcAft>
             </a:pPr>
             <a:r>
-              <a:t>Encryption at rest and in transit</a:t>
+              <a:rPr sz="2000" b="0">
+                <a:solidFill>
+                  <a:srgbClr val="333333"/>
+                </a:solidFill>
+                <a:latin typeface="Calibri"/>
+              </a:rPr>
+              <a:t>• Encryption at rest and in transit</a:t>
             </a:r>
           </a:p>
           <a:p>
             <a:pPr>
-              <a:defRPr sz="2000"/>
+              <a:lnSpc>
+                <a:spcPts val="2200"/>
+              </a:lnSpc>
+              <a:spcAft>
+                <a:spcPts val="1000"/>
+              </a:spcAft>
             </a:pPr>
             <a:r>
-              <a:t>Anonymization / de-identification for sharing</a:t>
+              <a:rPr sz="2000" b="0">
+                <a:solidFill>
+                  <a:srgbClr val="333333"/>
+                </a:solidFill>
+                <a:latin typeface="Calibri"/>
+              </a:rPr>
+              <a:t>• Anonymization / de-identification for sharing</a:t>
             </a:r>
           </a:p>
           <a:p>
             <a:pPr>
-              <a:defRPr sz="2000"/>
+              <a:lnSpc>
+                <a:spcPts val="2200"/>
+              </a:lnSpc>
+              <a:spcAft>
+                <a:spcPts val="1000"/>
+              </a:spcAft>
             </a:pPr>
             <a:r>
-              <a:t>MFA and role-based access</a:t>
+              <a:rPr sz="2000" b="0">
+                <a:solidFill>
+                  <a:srgbClr val="333333"/>
+                </a:solidFill>
+                <a:latin typeface="Calibri"/>
+              </a:rPr>
+              <a:t>• MFA and role-based access</a:t>
             </a:r>
           </a:p>
           <a:p>
             <a:pPr>
-              <a:defRPr sz="2000"/>
+              <a:lnSpc>
+                <a:spcPts val="2200"/>
+              </a:lnSpc>
+              <a:spcAft>
+                <a:spcPts val="1000"/>
+              </a:spcAft>
             </a:pPr>
             <a:r>
-              <a:t>Compliance (e.g., GDPR, HIPAA) plus audit logging</a:t>
+              <a:rPr sz="2000" b="0">
+                <a:solidFill>
+                  <a:srgbClr val="333333"/>
+                </a:solidFill>
+                <a:latin typeface="Calibri"/>
+              </a:rPr>
+              <a:t>• Compliance (e.g., GDPR, HIPAA) plus audit logging</a:t>
+            </a:r>
+          </a:p>
+        </p:txBody>
+      </p:sp>
+      <p:sp>
+        <p:nvSpPr>
+          <p:cNvPr id="4" name="TextBox 3"/>
+          <p:cNvSpPr txBox="1"/>
+          <p:nvPr/>
+        </p:nvSpPr>
+        <p:spPr>
+          <a:xfrm>
+            <a:off x="548640" y="6355080"/>
+            <a:ext cx="11064240" cy="320040"/>
+          </a:xfrm>
+          <a:prstGeom prst="rect">
+            <a:avLst/>
+          </a:prstGeom>
+          <a:noFill/>
+        </p:spPr>
+        <p:txBody>
+          <a:bodyPr wrap="square">
+            <a:noAutofit/>
+          </a:bodyPr>
+          <a:lstStyle/>
+          <a:p>
+            <a:pPr algn="r">
+              <a:lnSpc>
+                <a:spcPts val="2200"/>
+              </a:lnSpc>
+              <a:defRPr sz="1000" b="0">
+                <a:solidFill>
+                  <a:srgbClr val="666666"/>
+                </a:solidFill>
+                <a:latin typeface="Calibri"/>
+              </a:defRPr>
+            </a:pPr>
+            <a:r>
+              <a:t>Chapter 1 — Dataset Management</a:t>
             </a:r>
           </a:p>
         </p:txBody>
@@ -3591,8 +4038,8 @@
         </p:nvSpPr>
         <p:spPr>
           <a:xfrm>
-            <a:off x="548640" y="320040"/>
-            <a:ext cx="11064240" cy="914400"/>
+            <a:off x="548640" y="411480"/>
+            <a:ext cx="11064240" cy="777240"/>
           </a:xfrm>
           <a:prstGeom prst="rect">
             <a:avLst/>
@@ -3600,15 +4047,23 @@
           <a:noFill/>
         </p:spPr>
         <p:txBody>
-          <a:bodyPr wrap="none">
-            <a:spAutoFit/>
+          <a:bodyPr wrap="square">
+            <a:noAutofit/>
           </a:bodyPr>
           <a:lstStyle/>
           <a:p>
             <a:pPr>
-              <a:defRPr sz="3200" b="1"/>
+              <a:lnSpc>
+                <a:spcPts val="2200"/>
+              </a:lnSpc>
             </a:pPr>
             <a:r>
+              <a:rPr sz="2800" b="1">
+                <a:solidFill>
+                  <a:srgbClr val="1A1A2E"/>
+                </a:solidFill>
+                <a:latin typeface="Calibri"/>
+              </a:rPr>
               <a:t>Looking ahead</a:t>
             </a:r>
           </a:p>
@@ -3622,8 +4077,8 @@
         </p:nvSpPr>
         <p:spPr>
           <a:xfrm>
-            <a:off x="731520" y="1280160"/>
-            <a:ext cx="10515600" cy="5029200"/>
+            <a:off x="548640" y="1234440"/>
+            <a:ext cx="11064240" cy="4937760"/>
           </a:xfrm>
           <a:prstGeom prst="rect">
             <a:avLst/>
@@ -3632,31 +4087,141 @@
         </p:spPr>
         <p:txBody>
           <a:bodyPr wrap="square">
-            <a:spAutoFit/>
+            <a:noAutofit/>
           </a:bodyPr>
           <a:lstStyle/>
           <a:p>
             <a:pPr>
-              <a:defRPr sz="2000"/>
+              <a:lnSpc>
+                <a:spcPts val="2200"/>
+              </a:lnSpc>
+              <a:spcAft>
+                <a:spcPts val="1000"/>
+              </a:spcAft>
             </a:pPr>
             <a:r>
-              <a:t>This chapter: what datasets are and how to use them responsibly</a:t>
+              <a:rPr sz="2000" b="0">
+                <a:solidFill>
+                  <a:srgbClr val="333333"/>
+                </a:solidFill>
+                <a:latin typeface="Calibri"/>
+              </a:rPr>
+              <a:t>• This chapter: what datasets are and how to use them</a:t>
             </a:r>
           </a:p>
           <a:p>
             <a:pPr>
-              <a:defRPr sz="2000"/>
+              <a:lnSpc>
+                <a:spcPts val="2200"/>
+              </a:lnSpc>
+              <a:spcAft>
+                <a:spcPts val="1000"/>
+              </a:spcAft>
             </a:pPr>
             <a:r>
-              <a:t>Next: Chapter 2 — how records are collected</a:t>
+              <a:rPr sz="2000" b="0">
+                <a:solidFill>
+                  <a:srgbClr val="333333"/>
+                </a:solidFill>
+                <a:latin typeface="Calibri"/>
+              </a:rPr>
+              <a:t>      responsibly</a:t>
             </a:r>
           </a:p>
           <a:p>
             <a:pPr>
-              <a:defRPr sz="2000"/>
+              <a:lnSpc>
+                <a:spcPts val="2200"/>
+              </a:lnSpc>
+              <a:spcAft>
+                <a:spcPts val="1000"/>
+              </a:spcAft>
             </a:pPr>
             <a:r>
-              <a:t>Management depth continues in later chapters (privacy, docs, storage)</a:t>
+              <a:rPr sz="2000" b="0">
+                <a:solidFill>
+                  <a:srgbClr val="333333"/>
+                </a:solidFill>
+                <a:latin typeface="Calibri"/>
+              </a:rPr>
+              <a:t>• Next: Chapter 2 — how records are collected</a:t>
+            </a:r>
+          </a:p>
+          <a:p>
+            <a:pPr>
+              <a:lnSpc>
+                <a:spcPts val="2200"/>
+              </a:lnSpc>
+              <a:spcAft>
+                <a:spcPts val="1000"/>
+              </a:spcAft>
+            </a:pPr>
+            <a:r>
+              <a:rPr sz="2000" b="0">
+                <a:solidFill>
+                  <a:srgbClr val="333333"/>
+                </a:solidFill>
+                <a:latin typeface="Calibri"/>
+              </a:rPr>
+              <a:t>• Management depth continues in later chapters</a:t>
+            </a:r>
+          </a:p>
+          <a:p>
+            <a:pPr>
+              <a:lnSpc>
+                <a:spcPts val="2200"/>
+              </a:lnSpc>
+              <a:spcAft>
+                <a:spcPts val="1000"/>
+              </a:spcAft>
+            </a:pPr>
+            <a:r>
+              <a:rPr sz="2000" b="0">
+                <a:solidFill>
+                  <a:srgbClr val="333333"/>
+                </a:solidFill>
+                <a:latin typeface="Calibri"/>
+              </a:rPr>
+              <a:t>      (privacy, docs, storage)</a:t>
+            </a:r>
+          </a:p>
+        </p:txBody>
+      </p:sp>
+      <p:sp>
+        <p:nvSpPr>
+          <p:cNvPr id="4" name="TextBox 3"/>
+          <p:cNvSpPr txBox="1"/>
+          <p:nvPr/>
+        </p:nvSpPr>
+        <p:spPr>
+          <a:xfrm>
+            <a:off x="548640" y="6355080"/>
+            <a:ext cx="11064240" cy="320040"/>
+          </a:xfrm>
+          <a:prstGeom prst="rect">
+            <a:avLst/>
+          </a:prstGeom>
+          <a:noFill/>
+        </p:spPr>
+        <p:txBody>
+          <a:bodyPr wrap="square">
+            <a:noAutofit/>
+          </a:bodyPr>
+          <a:lstStyle/>
+          <a:p>
+            <a:pPr algn="r">
+              <a:lnSpc>
+                <a:spcPts val="2200"/>
+              </a:lnSpc>
+              <a:defRPr sz="1000" b="0">
+                <a:solidFill>
+                  <a:srgbClr val="666666"/>
+                </a:solidFill>
+                <a:latin typeface="Calibri"/>
+              </a:defRPr>
+            </a:pPr>
+            <a:r>
+              <a:t>Chapter 1 — Dataset Management</a:t>
             </a:r>
           </a:p>
         </p:txBody>
@@ -3687,8 +4252,8 @@
         </p:nvSpPr>
         <p:spPr>
           <a:xfrm>
-            <a:off x="548640" y="320040"/>
-            <a:ext cx="11064240" cy="914400"/>
+            <a:off x="548640" y="411480"/>
+            <a:ext cx="11064240" cy="777240"/>
           </a:xfrm>
           <a:prstGeom prst="rect">
             <a:avLst/>
@@ -3696,15 +4261,23 @@
           <a:noFill/>
         </p:spPr>
         <p:txBody>
-          <a:bodyPr wrap="none">
-            <a:spAutoFit/>
+          <a:bodyPr wrap="square">
+            <a:noAutofit/>
           </a:bodyPr>
           <a:lstStyle/>
           <a:p>
             <a:pPr>
-              <a:defRPr sz="3200" b="1"/>
+              <a:lnSpc>
+                <a:spcPts val="2200"/>
+              </a:lnSpc>
             </a:pPr>
             <a:r>
+              <a:rPr sz="2800" b="1">
+                <a:solidFill>
+                  <a:srgbClr val="1A1A2E"/>
+                </a:solidFill>
+                <a:latin typeface="Calibri"/>
+              </a:rPr>
               <a:t>Takeaways</a:t>
             </a:r>
           </a:p>
@@ -3718,8 +4291,8 @@
         </p:nvSpPr>
         <p:spPr>
           <a:xfrm>
-            <a:off x="731520" y="1280160"/>
-            <a:ext cx="10515600" cy="5029200"/>
+            <a:off x="548640" y="1234440"/>
+            <a:ext cx="11064240" cy="4937760"/>
           </a:xfrm>
           <a:prstGeom prst="rect">
             <a:avLst/>
@@ -3728,63 +4301,78 @@
         </p:spPr>
         <p:txBody>
           <a:bodyPr wrap="square">
-            <a:spAutoFit/>
+            <a:noAutofit/>
           </a:bodyPr>
           <a:lstStyle/>
           <a:p>
             <a:pPr>
-              <a:defRPr sz="2000"/>
+              <a:lnSpc>
+                <a:spcPts val="2200"/>
+              </a:lnSpc>
+              <a:spcAft>
+                <a:spcPts val="1000"/>
+              </a:spcAft>
             </a:pPr>
             <a:r>
-              <a:t>Management is not an optional add-on</a:t>
+              <a:rPr sz="2000" b="0">
+                <a:solidFill>
+                  <a:srgbClr val="333333"/>
+                </a:solidFill>
+                <a:latin typeface="Calibri"/>
+              </a:rPr>
+              <a:t>• Management is not an optional add-on</a:t>
             </a:r>
           </a:p>
           <a:p>
             <a:pPr>
-              <a:defRPr sz="2000"/>
+              <a:lnSpc>
+                <a:spcPts val="2200"/>
+              </a:lnSpc>
+              <a:spcAft>
+                <a:spcPts val="1000"/>
+              </a:spcAft>
             </a:pPr>
             <a:r>
-              <a:t>Versioning + metadata + access must work together</a:t>
+              <a:rPr sz="2000" b="0">
+                <a:solidFill>
+                  <a:srgbClr val="333333"/>
+                </a:solidFill>
+                <a:latin typeface="Calibri"/>
+              </a:rPr>
+              <a:t>• Versioning + metadata + access must work together</a:t>
             </a:r>
           </a:p>
           <a:p>
             <a:pPr>
-              <a:defRPr sz="2000"/>
+              <a:lnSpc>
+                <a:spcPts val="2200"/>
+              </a:lnSpc>
+              <a:spcAft>
+                <a:spcPts val="1000"/>
+              </a:spcAft>
             </a:pPr>
             <a:r>
-              <a:t>Protection begins when records are first stored</a:t>
-            </a:r>
-          </a:p>
-        </p:txBody>
-      </p:sp>
-    </p:spTree>
-  </p:cSld>
-  <p:clrMapOvr>
-    <a:masterClrMapping/>
-  </p:clrMapOvr>
-</p:sld>
-</file>
-
-<file path=ppt/slides/slide8.xml><?xml version="1.0" encoding="utf-8"?>
-<p:sld xmlns:a="http://schemas.openxmlformats.org/drawingml/2006/main" xmlns:p="http://schemas.openxmlformats.org/presentationml/2006/main" xmlns:r="http://schemas.openxmlformats.org/officeDocument/2006/relationships">
-  <p:cSld>
-    <p:spTree>
-      <p:nvGrpSpPr>
-        <p:cNvPr id="1" name=""/>
-        <p:cNvGrpSpPr/>
-        <p:nvPr/>
-      </p:nvGrpSpPr>
-      <p:grpSpPr/>
-      <p:sp>
-        <p:nvSpPr>
-          <p:cNvPr id="2" name="TextBox 1"/>
+              <a:rPr sz="2000" b="0">
+                <a:solidFill>
+                  <a:srgbClr val="333333"/>
+                </a:solidFill>
+                <a:latin typeface="Calibri"/>
+              </a:rPr>
+              <a:t>• Protection begins when records are first stored</a:t>
+            </a:r>
+          </a:p>
+        </p:txBody>
+      </p:sp>
+      <p:sp>
+        <p:nvSpPr>
+          <p:cNvPr id="4" name="TextBox 3"/>
           <p:cNvSpPr txBox="1"/>
           <p:nvPr/>
         </p:nvSpPr>
         <p:spPr>
           <a:xfrm>
-            <a:off x="548640" y="320040"/>
-            <a:ext cx="11064240" cy="914400"/>
+            <a:off x="548640" y="6355080"/>
+            <a:ext cx="11064240" cy="320040"/>
           </a:xfrm>
           <a:prstGeom prst="rect">
             <a:avLst/>
@@ -3792,55 +4380,24 @@
           <a:noFill/>
         </p:spPr>
         <p:txBody>
-          <a:bodyPr wrap="none">
-            <a:spAutoFit/>
+          <a:bodyPr wrap="square">
+            <a:noAutofit/>
           </a:bodyPr>
           <a:lstStyle/>
           <a:p>
-            <a:pPr>
-              <a:defRPr sz="3200" b="1"/>
+            <a:pPr algn="r">
+              <a:lnSpc>
+                <a:spcPts val="2200"/>
+              </a:lnSpc>
+              <a:defRPr sz="1000" b="0">
+                <a:solidFill>
+                  <a:srgbClr val="666666"/>
+                </a:solidFill>
+                <a:latin typeface="Calibri"/>
+              </a:defRPr>
             </a:pPr>
             <a:r>
-              <a:t>Next</a:t>
-            </a:r>
-          </a:p>
-        </p:txBody>
-      </p:sp>
-      <p:sp>
-        <p:nvSpPr>
-          <p:cNvPr id="3" name="TextBox 2"/>
-          <p:cNvSpPr txBox="1"/>
-          <p:nvPr/>
-        </p:nvSpPr>
-        <p:spPr>
-          <a:xfrm>
-            <a:off x="731520" y="1280160"/>
-            <a:ext cx="10515600" cy="5029200"/>
-          </a:xfrm>
-          <a:prstGeom prst="rect">
-            <a:avLst/>
-          </a:prstGeom>
-          <a:noFill/>
-        </p:spPr>
-        <p:txBody>
-          <a:bodyPr wrap="square">
-            <a:spAutoFit/>
-          </a:bodyPr>
-          <a:lstStyle/>
-          <a:p>
-            <a:pPr>
-              <a:defRPr sz="2000"/>
-            </a:pPr>
-            <a:r>
-              <a:t>Complete the quiz for this clip</a:t>
-            </a:r>
-          </a:p>
-          <a:p>
-            <a:pPr>
-              <a:defRPr sz="2000"/>
-            </a:pPr>
-            <a:r>
-              <a:t>Return to the chapter learning path or continue to Chapter 2</a:t>
+              <a:t>Chapter 1 — Dataset Management</a:t>
             </a:r>
           </a:p>
         </p:txBody>

--- a/chapter1/clips/clip-07-dataset-management/clip.pptx
+++ b/chapter1/clips/clip-07-dataset-management/clip.pptx
@@ -6,12 +6,13 @@
   </p:sldMasterIdLst>
   <p:sldIdLst>
     <p:sldId id="256" r:id="rId7"/>
-    <p:sldId id="257" r:id="rId8"/>
-    <p:sldId id="258" r:id="rId9"/>
-    <p:sldId id="259" r:id="rId10"/>
-    <p:sldId id="260" r:id="rId11"/>
-    <p:sldId id="261" r:id="rId12"/>
-    <p:sldId id="262" r:id="rId13"/>
+    <p:sldId id="257" r:id="rId9"/>
+    <p:sldId id="258" r:id="rId10"/>
+    <p:sldId id="259" r:id="rId11"/>
+    <p:sldId id="260" r:id="rId12"/>
+    <p:sldId id="261" r:id="rId13"/>
+    <p:sldId id="262" r:id="rId14"/>
+    <p:sldId id="263" r:id="rId15"/>
   </p:sldIdLst>
   <p:sldSz cx="12191695" cy="6858000" type="screen4x3"/>
   <p:notesSz cx="6858000" cy="9144000"/>
@@ -111,6 +112,916 @@
     </a:lvl9pPr>
   </p:defaultTextStyle>
 </p:presentation>
+</file>
+
+<file path=ppt/notesMasters/notesMaster1.xml><?xml version="1.0" encoding="utf-8"?>
+<p:notesMaster xmlns:a="http://schemas.openxmlformats.org/drawingml/2006/main" xmlns:p="http://schemas.openxmlformats.org/presentationml/2006/main" xmlns:r="http://schemas.openxmlformats.org/officeDocument/2006/relationships">
+  <p:cSld>
+    <p:bg>
+      <p:bgRef idx="1001">
+        <a:schemeClr val="bg1"/>
+      </p:bgRef>
+    </p:bg>
+    <p:spTree>
+      <p:nvGrpSpPr>
+        <p:cNvPr id="1" name=""/>
+        <p:cNvGrpSpPr/>
+        <p:nvPr/>
+      </p:nvGrpSpPr>
+      <p:grpSpPr>
+        <a:xfrm>
+          <a:off x="0" y="0"/>
+          <a:ext cx="0" cy="0"/>
+          <a:chOff x="0" y="0"/>
+          <a:chExt cx="0" cy="0"/>
+        </a:xfrm>
+      </p:grpSpPr>
+      <p:sp>
+        <p:nvSpPr>
+          <p:cNvPr id="2" name="Header Placeholder 1"/>
+          <p:cNvSpPr>
+            <a:spLocks noGrp="1"/>
+          </p:cNvSpPr>
+          <p:nvPr>
+            <p:ph type="hdr" sz="quarter"/>
+          </p:nvPr>
+        </p:nvSpPr>
+        <p:spPr>
+          <a:xfrm>
+            <a:off x="0" y="0"/>
+            <a:ext cx="2971800" cy="457200"/>
+          </a:xfrm>
+          <a:prstGeom prst="rect">
+            <a:avLst/>
+          </a:prstGeom>
+        </p:spPr>
+        <p:txBody>
+          <a:bodyPr vert="horz" lIns="91440" tIns="45720" rIns="91440" bIns="45720" rtlCol="0"/>
+          <a:lstStyle>
+            <a:lvl1pPr algn="l">
+              <a:defRPr sz="1200"/>
+            </a:lvl1pPr>
+          </a:lstStyle>
+          <a:p>
+            <a:endParaRPr lang="en-US"/>
+          </a:p>
+        </p:txBody>
+      </p:sp>
+      <p:sp>
+        <p:nvSpPr>
+          <p:cNvPr id="3" name="Date Placeholder 2"/>
+          <p:cNvSpPr>
+            <a:spLocks noGrp="1"/>
+          </p:cNvSpPr>
+          <p:nvPr>
+            <p:ph type="dt" idx="1"/>
+          </p:nvPr>
+        </p:nvSpPr>
+        <p:spPr>
+          <a:xfrm>
+            <a:off x="3884613" y="0"/>
+            <a:ext cx="2971800" cy="457200"/>
+          </a:xfrm>
+          <a:prstGeom prst="rect">
+            <a:avLst/>
+          </a:prstGeom>
+        </p:spPr>
+        <p:txBody>
+          <a:bodyPr vert="horz" lIns="91440" tIns="45720" rIns="91440" bIns="45720" rtlCol="0"/>
+          <a:lstStyle>
+            <a:lvl1pPr algn="r">
+              <a:defRPr sz="1200"/>
+            </a:lvl1pPr>
+          </a:lstStyle>
+          <a:p>
+            <a:fld id="{0F89C1C7-3DCD-1040-A9CF-14679D8B5DDD}" type="datetimeFigureOut">
+              <a:rPr lang="en-US" smtClean="0"/>
+              <a:t>10/17/16</a:t>
+            </a:fld>
+            <a:endParaRPr lang="en-US"/>
+          </a:p>
+        </p:txBody>
+      </p:sp>
+      <p:sp>
+        <p:nvSpPr>
+          <p:cNvPr id="4" name="Slide Image Placeholder 3"/>
+          <p:cNvSpPr>
+            <a:spLocks noGrp="1" noRot="1" noChangeAspect="1"/>
+          </p:cNvSpPr>
+          <p:nvPr>
+            <p:ph type="sldImg" idx="2"/>
+          </p:nvPr>
+        </p:nvSpPr>
+        <p:spPr>
+          <a:xfrm>
+            <a:off x="1143000" y="685800"/>
+            <a:ext cx="4572000" cy="3429000"/>
+          </a:xfrm>
+          <a:prstGeom prst="rect">
+            <a:avLst/>
+          </a:prstGeom>
+          <a:noFill/>
+          <a:ln w="12700">
+            <a:solidFill>
+              <a:prstClr val="black"/>
+            </a:solidFill>
+          </a:ln>
+        </p:spPr>
+        <p:txBody>
+          <a:bodyPr vert="horz" lIns="91440" tIns="45720" rIns="91440" bIns="45720" rtlCol="0" anchor="ctr"/>
+          <a:lstStyle/>
+          <a:p>
+            <a:endParaRPr lang="en-US"/>
+          </a:p>
+        </p:txBody>
+      </p:sp>
+      <p:sp>
+        <p:nvSpPr>
+          <p:cNvPr id="5" name="Notes Placeholder 4"/>
+          <p:cNvSpPr>
+            <a:spLocks noGrp="1"/>
+          </p:cNvSpPr>
+          <p:nvPr>
+            <p:ph type="body" sz="quarter" idx="3"/>
+          </p:nvPr>
+        </p:nvSpPr>
+        <p:spPr>
+          <a:xfrm>
+            <a:off x="685800" y="4343400"/>
+            <a:ext cx="5486400" cy="4114800"/>
+          </a:xfrm>
+          <a:prstGeom prst="rect">
+            <a:avLst/>
+          </a:prstGeom>
+        </p:spPr>
+        <p:txBody>
+          <a:bodyPr vert="horz" lIns="91440" tIns="45720" rIns="91440" bIns="45720" rtlCol="0"/>
+          <a:lstStyle/>
+          <a:p>
+            <a:pPr lvl="0"/>
+            <a:r>
+              <a:rPr lang="en-US" smtClean="0"/>
+              <a:t>Click to edit Master text styles</a:t>
+            </a:r>
+          </a:p>
+          <a:p>
+            <a:pPr lvl="1"/>
+            <a:r>
+              <a:rPr lang="en-US" smtClean="0"/>
+              <a:t>Second level</a:t>
+            </a:r>
+          </a:p>
+          <a:p>
+            <a:pPr lvl="2"/>
+            <a:r>
+              <a:rPr lang="en-US" smtClean="0"/>
+              <a:t>Third level</a:t>
+            </a:r>
+          </a:p>
+          <a:p>
+            <a:pPr lvl="3"/>
+            <a:r>
+              <a:rPr lang="en-US" smtClean="0"/>
+              <a:t>Fourth level</a:t>
+            </a:r>
+          </a:p>
+          <a:p>
+            <a:pPr lvl="4"/>
+            <a:r>
+              <a:rPr lang="en-US" smtClean="0"/>
+              <a:t>Fifth level</a:t>
+            </a:r>
+            <a:endParaRPr lang="en-US"/>
+          </a:p>
+        </p:txBody>
+      </p:sp>
+      <p:sp>
+        <p:nvSpPr>
+          <p:cNvPr id="6" name="Footer Placeholder 5"/>
+          <p:cNvSpPr>
+            <a:spLocks noGrp="1"/>
+          </p:cNvSpPr>
+          <p:nvPr>
+            <p:ph type="ftr" sz="quarter" idx="4"/>
+          </p:nvPr>
+        </p:nvSpPr>
+        <p:spPr>
+          <a:xfrm>
+            <a:off x="0" y="8685213"/>
+            <a:ext cx="2971800" cy="457200"/>
+          </a:xfrm>
+          <a:prstGeom prst="rect">
+            <a:avLst/>
+          </a:prstGeom>
+        </p:spPr>
+        <p:txBody>
+          <a:bodyPr vert="horz" lIns="91440" tIns="45720" rIns="91440" bIns="45720" rtlCol="0" anchor="b"/>
+          <a:lstStyle>
+            <a:lvl1pPr algn="l">
+              <a:defRPr sz="1200"/>
+            </a:lvl1pPr>
+          </a:lstStyle>
+          <a:p>
+            <a:endParaRPr lang="en-US"/>
+          </a:p>
+        </p:txBody>
+      </p:sp>
+      <p:sp>
+        <p:nvSpPr>
+          <p:cNvPr id="7" name="Slide Number Placeholder 6"/>
+          <p:cNvSpPr>
+            <a:spLocks noGrp="1"/>
+          </p:cNvSpPr>
+          <p:nvPr>
+            <p:ph type="sldNum" sz="quarter" idx="5"/>
+          </p:nvPr>
+        </p:nvSpPr>
+        <p:spPr>
+          <a:xfrm>
+            <a:off x="3884613" y="8685213"/>
+            <a:ext cx="2971800" cy="457200"/>
+          </a:xfrm>
+          <a:prstGeom prst="rect">
+            <a:avLst/>
+          </a:prstGeom>
+        </p:spPr>
+        <p:txBody>
+          <a:bodyPr vert="horz" lIns="91440" tIns="45720" rIns="91440" bIns="45720" rtlCol="0" anchor="b"/>
+          <a:lstStyle>
+            <a:lvl1pPr algn="r">
+              <a:defRPr sz="1200"/>
+            </a:lvl1pPr>
+          </a:lstStyle>
+          <a:p>
+            <a:fld id="{BB5E49A5-4136-284D-997B-48E1D791AD67}" type="slidenum">
+              <a:rPr lang="en-US" smtClean="0"/>
+              <a:t>‹#›</a:t>
+            </a:fld>
+            <a:endParaRPr lang="en-US"/>
+          </a:p>
+        </p:txBody>
+      </p:sp>
+    </p:spTree>
+    <p:extLst>
+      <p:ext uri="{BB962C8B-B14F-4D97-AF65-F5344CB8AC3E}">
+        <p14:creationId xmlns:p14="http://schemas.microsoft.com/office/powerpoint/2010/main" val="2623252185"/>
+      </p:ext>
+    </p:extLst>
+  </p:cSld>
+  <p:clrMap bg1="lt1" tx1="dk1" bg2="lt2" tx2="dk2" accent1="accent1" accent2="accent2" accent3="accent3" accent4="accent4" accent5="accent5" accent6="accent6" hlink="hlink" folHlink="folHlink"/>
+  <p:notesStyle>
+    <a:lvl1pPr marL="0" algn="l" defTabSz="457200" rtl="0" eaLnBrk="1" latinLnBrk="0" hangingPunct="1">
+      <a:defRPr sz="1200" kern="1200">
+        <a:solidFill>
+          <a:schemeClr val="tx1"/>
+        </a:solidFill>
+        <a:latin typeface="+mn-lt"/>
+        <a:ea typeface="+mn-ea"/>
+        <a:cs typeface="+mn-cs"/>
+      </a:defRPr>
+    </a:lvl1pPr>
+    <a:lvl2pPr marL="457200" algn="l" defTabSz="457200" rtl="0" eaLnBrk="1" latinLnBrk="0" hangingPunct="1">
+      <a:defRPr sz="1200" kern="1200">
+        <a:solidFill>
+          <a:schemeClr val="tx1"/>
+        </a:solidFill>
+        <a:latin typeface="+mn-lt"/>
+        <a:ea typeface="+mn-ea"/>
+        <a:cs typeface="+mn-cs"/>
+      </a:defRPr>
+    </a:lvl2pPr>
+    <a:lvl3pPr marL="914400" algn="l" defTabSz="457200" rtl="0" eaLnBrk="1" latinLnBrk="0" hangingPunct="1">
+      <a:defRPr sz="1200" kern="1200">
+        <a:solidFill>
+          <a:schemeClr val="tx1"/>
+        </a:solidFill>
+        <a:latin typeface="+mn-lt"/>
+        <a:ea typeface="+mn-ea"/>
+        <a:cs typeface="+mn-cs"/>
+      </a:defRPr>
+    </a:lvl3pPr>
+    <a:lvl4pPr marL="1371600" algn="l" defTabSz="457200" rtl="0" eaLnBrk="1" latinLnBrk="0" hangingPunct="1">
+      <a:defRPr sz="1200" kern="1200">
+        <a:solidFill>
+          <a:schemeClr val="tx1"/>
+        </a:solidFill>
+        <a:latin typeface="+mn-lt"/>
+        <a:ea typeface="+mn-ea"/>
+        <a:cs typeface="+mn-cs"/>
+      </a:defRPr>
+    </a:lvl4pPr>
+    <a:lvl5pPr marL="1828800" algn="l" defTabSz="457200" rtl="0" eaLnBrk="1" latinLnBrk="0" hangingPunct="1">
+      <a:defRPr sz="1200" kern="1200">
+        <a:solidFill>
+          <a:schemeClr val="tx1"/>
+        </a:solidFill>
+        <a:latin typeface="+mn-lt"/>
+        <a:ea typeface="+mn-ea"/>
+        <a:cs typeface="+mn-cs"/>
+      </a:defRPr>
+    </a:lvl5pPr>
+    <a:lvl6pPr marL="2286000" algn="l" defTabSz="457200" rtl="0" eaLnBrk="1" latinLnBrk="0" hangingPunct="1">
+      <a:defRPr sz="1200" kern="1200">
+        <a:solidFill>
+          <a:schemeClr val="tx1"/>
+        </a:solidFill>
+        <a:latin typeface="+mn-lt"/>
+        <a:ea typeface="+mn-ea"/>
+        <a:cs typeface="+mn-cs"/>
+      </a:defRPr>
+    </a:lvl6pPr>
+    <a:lvl7pPr marL="2743200" algn="l" defTabSz="457200" rtl="0" eaLnBrk="1" latinLnBrk="0" hangingPunct="1">
+      <a:defRPr sz="1200" kern="1200">
+        <a:solidFill>
+          <a:schemeClr val="tx1"/>
+        </a:solidFill>
+        <a:latin typeface="+mn-lt"/>
+        <a:ea typeface="+mn-ea"/>
+        <a:cs typeface="+mn-cs"/>
+      </a:defRPr>
+    </a:lvl7pPr>
+    <a:lvl8pPr marL="3200400" algn="l" defTabSz="457200" rtl="0" eaLnBrk="1" latinLnBrk="0" hangingPunct="1">
+      <a:defRPr sz="1200" kern="1200">
+        <a:solidFill>
+          <a:schemeClr val="tx1"/>
+        </a:solidFill>
+        <a:latin typeface="+mn-lt"/>
+        <a:ea typeface="+mn-ea"/>
+        <a:cs typeface="+mn-cs"/>
+      </a:defRPr>
+    </a:lvl8pPr>
+    <a:lvl9pPr marL="3657600" algn="l" defTabSz="457200" rtl="0" eaLnBrk="1" latinLnBrk="0" hangingPunct="1">
+      <a:defRPr sz="1200" kern="1200">
+        <a:solidFill>
+          <a:schemeClr val="tx1"/>
+        </a:solidFill>
+        <a:latin typeface="+mn-lt"/>
+        <a:ea typeface="+mn-ea"/>
+        <a:cs typeface="+mn-cs"/>
+      </a:defRPr>
+    </a:lvl9pPr>
+  </p:notesStyle>
+</p:notesMaster>
+</file>
+
+<file path=ppt/notesSlides/notesSlide1.xml><?xml version="1.0" encoding="utf-8"?>
+<p:notes xmlns:a="http://schemas.openxmlformats.org/drawingml/2006/main" xmlns:p="http://schemas.openxmlformats.org/presentationml/2006/main" xmlns:r="http://schemas.openxmlformats.org/officeDocument/2006/relationships">
+  <p:cSld>
+    <p:spTree>
+      <p:nvGrpSpPr>
+        <p:cNvPr id="1" name=""/>
+        <p:cNvGrpSpPr/>
+        <p:nvPr/>
+      </p:nvGrpSpPr>
+      <p:grpSpPr>
+        <a:xfrm>
+          <a:off x="0" y="0"/>
+          <a:ext cx="0" cy="0"/>
+          <a:chOff x="0" y="0"/>
+          <a:chExt cx="0" cy="0"/>
+        </a:xfrm>
+      </p:grpSpPr>
+      <p:sp>
+        <p:nvSpPr>
+          <p:cNvPr id="2" name="Slide Image Placeholder 1"/>
+          <p:cNvSpPr>
+            <a:spLocks noGrp="1"/>
+          </p:cNvSpPr>
+          <p:nvPr>
+            <p:ph type="sldImg" idx="2"/>
+          </p:nvPr>
+        </p:nvSpPr>
+        <p:spPr/>
+      </p:sp>
+      <p:sp>
+        <p:nvSpPr>
+          <p:cNvPr id="3" name="Notes Placeholder 2"/>
+          <p:cNvSpPr>
+            <a:spLocks noGrp="1"/>
+          </p:cNvSpPr>
+          <p:nvPr>
+            <p:ph type="body" idx="3" sz="quarter"/>
+          </p:nvPr>
+        </p:nvSpPr>
+        <p:spPr/>
+        <p:txBody>
+          <a:bodyPr/>
+          <a:lstStyle/>
+          <a:p>
+            <a:r>
+              <a:t>Models and dashboards depend on quieter work: who may access the table, which version was trained, where backups live, and how long personal fields may be retained. This final clip introduces that discipline.</a:t>
+            </a:r>
+          </a:p>
+        </p:txBody>
+      </p:sp>
+      <p:sp>
+        <p:nvSpPr>
+          <p:cNvPr id="4" name="Slide Number Placeholder 3"/>
+          <p:cNvSpPr>
+            <a:spLocks noGrp="1"/>
+          </p:cNvSpPr>
+          <p:nvPr>
+            <p:ph type="sldNum" idx="5" sz="quarter"/>
+          </p:nvPr>
+        </p:nvSpPr>
+        <p:spPr/>
+      </p:sp>
+    </p:spTree>
+  </p:cSld>
+  <p:clrMapOvr>
+    <a:masterClrMapping/>
+  </p:clrMapOvr>
+</p:notes>
+</file>
+
+<file path=ppt/notesSlides/notesSlide2.xml><?xml version="1.0" encoding="utf-8"?>
+<p:notes xmlns:a="http://schemas.openxmlformats.org/drawingml/2006/main" xmlns:p="http://schemas.openxmlformats.org/presentationml/2006/main" xmlns:r="http://schemas.openxmlformats.org/officeDocument/2006/relationships">
+  <p:cSld>
+    <p:spTree>
+      <p:nvGrpSpPr>
+        <p:cNvPr id="1" name=""/>
+        <p:cNvGrpSpPr/>
+        <p:nvPr/>
+      </p:nvGrpSpPr>
+      <p:grpSpPr>
+        <a:xfrm>
+          <a:off x="0" y="0"/>
+          <a:ext cx="0" cy="0"/>
+          <a:chOff x="0" y="0"/>
+          <a:chExt cx="0" cy="0"/>
+        </a:xfrm>
+      </p:grpSpPr>
+      <p:sp>
+        <p:nvSpPr>
+          <p:cNvPr id="2" name="Slide Image Placeholder 1"/>
+          <p:cNvSpPr>
+            <a:spLocks noGrp="1"/>
+          </p:cNvSpPr>
+          <p:nvPr>
+            <p:ph type="sldImg" idx="2"/>
+          </p:nvPr>
+        </p:nvSpPr>
+        <p:spPr/>
+      </p:sp>
+      <p:sp>
+        <p:nvSpPr>
+          <p:cNvPr id="3" name="Notes Placeholder 2"/>
+          <p:cNvSpPr>
+            <a:spLocks noGrp="1"/>
+          </p:cNvSpPr>
+          <p:nvPr>
+            <p:ph type="body" idx="3" sz="quarter"/>
+          </p:nvPr>
+        </p:nvSpPr>
+        <p:spPr/>
+        <p:txBody>
+          <a:bodyPr/>
+          <a:lstStyle/>
+          <a:p>
+            <a:r>
+              <a:t>You should explain why management matters after a model ships, list core practices such as versioning and access control, and name privacy controls that protect sensitive extracts.</a:t>
+            </a:r>
+          </a:p>
+        </p:txBody>
+      </p:sp>
+      <p:sp>
+        <p:nvSpPr>
+          <p:cNvPr id="4" name="Slide Number Placeholder 3"/>
+          <p:cNvSpPr>
+            <a:spLocks noGrp="1"/>
+          </p:cNvSpPr>
+          <p:nvPr>
+            <p:ph type="sldNum" idx="5" sz="quarter"/>
+          </p:nvPr>
+        </p:nvSpPr>
+        <p:spPr/>
+      </p:sp>
+    </p:spTree>
+  </p:cSld>
+  <p:clrMapOvr>
+    <a:masterClrMapping/>
+  </p:clrMapOvr>
+</p:notes>
+</file>
+
+<file path=ppt/notesSlides/notesSlide3.xml><?xml version="1.0" encoding="utf-8"?>
+<p:notes xmlns:a="http://schemas.openxmlformats.org/drawingml/2006/main" xmlns:p="http://schemas.openxmlformats.org/presentationml/2006/main" xmlns:r="http://schemas.openxmlformats.org/officeDocument/2006/relationships">
+  <p:cSld>
+    <p:spTree>
+      <p:nvGrpSpPr>
+        <p:cNvPr id="1" name=""/>
+        <p:cNvGrpSpPr/>
+        <p:nvPr/>
+      </p:nvGrpSpPr>
+      <p:grpSpPr>
+        <a:xfrm>
+          <a:off x="0" y="0"/>
+          <a:ext cx="0" cy="0"/>
+          <a:chOff x="0" y="0"/>
+          <a:chExt cx="0" cy="0"/>
+        </a:xfrm>
+      </p:grpSpPr>
+      <p:sp>
+        <p:nvSpPr>
+          <p:cNvPr id="2" name="Slide Image Placeholder 1"/>
+          <p:cNvSpPr>
+            <a:spLocks noGrp="1"/>
+          </p:cNvSpPr>
+          <p:nvPr>
+            <p:ph type="sldImg" idx="2"/>
+          </p:nvPr>
+        </p:nvSpPr>
+        <p:spPr/>
+      </p:sp>
+      <p:sp>
+        <p:nvSpPr>
+          <p:cNvPr id="3" name="Notes Placeholder 2"/>
+          <p:cNvSpPr>
+            <a:spLocks noGrp="1"/>
+          </p:cNvSpPr>
+          <p:nvPr>
+            <p:ph type="body" idx="3" sz="quarter"/>
+          </p:nvPr>
+        </p:nvSpPr>
+        <p:spPr/>
+        <p:txBody>
+          <a:bodyPr/>
+          <a:lstStyle/>
+          <a:p>
+            <a:r>
+              <a:t>A dataset is collected, cleaned, documented, stored, shared, and sometimes retired. Traceability links figures to their sources; ownership and documentation reduce duplicated effort; governance limits who can see sensitive fields. Without these foundations, tuned models can amplify undocumented errors or leak attributes that should never leave a restricted store.</a:t>
+            </a:r>
+          </a:p>
+        </p:txBody>
+      </p:sp>
+      <p:sp>
+        <p:nvSpPr>
+          <p:cNvPr id="4" name="Slide Number Placeholder 3"/>
+          <p:cNvSpPr>
+            <a:spLocks noGrp="1"/>
+          </p:cNvSpPr>
+          <p:nvPr>
+            <p:ph type="sldNum" idx="5" sz="quarter"/>
+          </p:nvPr>
+        </p:nvSpPr>
+        <p:spPr/>
+      </p:sp>
+    </p:spTree>
+  </p:cSld>
+  <p:clrMapOvr>
+    <a:masterClrMapping/>
+  </p:clrMapOvr>
+</p:notes>
+</file>
+
+<file path=ppt/notesSlides/notesSlide4.xml><?xml version="1.0" encoding="utf-8"?>
+<p:notes xmlns:a="http://schemas.openxmlformats.org/drawingml/2006/main" xmlns:p="http://schemas.openxmlformats.org/presentationml/2006/main" xmlns:r="http://schemas.openxmlformats.org/officeDocument/2006/relationships">
+  <p:cSld>
+    <p:spTree>
+      <p:nvGrpSpPr>
+        <p:cNvPr id="1" name=""/>
+        <p:cNvGrpSpPr/>
+        <p:nvPr/>
+      </p:nvGrpSpPr>
+      <p:grpSpPr>
+        <a:xfrm>
+          <a:off x="0" y="0"/>
+          <a:ext cx="0" cy="0"/>
+          <a:chOff x="0" y="0"/>
+          <a:chExt cx="0" cy="0"/>
+        </a:xfrm>
+      </p:grpSpPr>
+      <p:sp>
+        <p:nvSpPr>
+          <p:cNvPr id="2" name="Slide Image Placeholder 1"/>
+          <p:cNvSpPr>
+            <a:spLocks noGrp="1"/>
+          </p:cNvSpPr>
+          <p:nvPr>
+            <p:ph type="sldImg" idx="2"/>
+          </p:nvPr>
+        </p:nvSpPr>
+        <p:spPr/>
+      </p:sp>
+      <p:sp>
+        <p:nvSpPr>
+          <p:cNvPr id="3" name="Notes Placeholder 2"/>
+          <p:cNvSpPr>
+            <a:spLocks noGrp="1"/>
+          </p:cNvSpPr>
+          <p:nvPr>
+            <p:ph type="body" idx="3" sz="quarter"/>
+          </p:nvPr>
+        </p:nvSpPr>
+        <p:spPr/>
+        <p:txBody>
+          <a:bodyPr/>
+          <a:lstStyle/>
+          <a:p>
+            <a:r>
+              <a:t>Table 1.8 highlights version control, cleaning and transformation, metadata documentation, storage and backups, access control, and cataloging. These reinforce one another: a versioned file without metadata still confuses new users; rich docs without access controls may violate privacy rules.</a:t>
+            </a:r>
+          </a:p>
+        </p:txBody>
+      </p:sp>
+      <p:sp>
+        <p:nvSpPr>
+          <p:cNvPr id="4" name="Slide Number Placeholder 3"/>
+          <p:cNvSpPr>
+            <a:spLocks noGrp="1"/>
+          </p:cNvSpPr>
+          <p:nvPr>
+            <p:ph type="sldNum" idx="5" sz="quarter"/>
+          </p:nvPr>
+        </p:nvSpPr>
+        <p:spPr/>
+      </p:sp>
+    </p:spTree>
+  </p:cSld>
+  <p:clrMapOvr>
+    <a:masterClrMapping/>
+  </p:clrMapOvr>
+</p:notes>
+</file>
+
+<file path=ppt/notesSlides/notesSlide5.xml><?xml version="1.0" encoding="utf-8"?>
+<p:notes xmlns:a="http://schemas.openxmlformats.org/drawingml/2006/main" xmlns:p="http://schemas.openxmlformats.org/presentationml/2006/main" xmlns:r="http://schemas.openxmlformats.org/officeDocument/2006/relationships">
+  <p:cSld>
+    <p:spTree>
+      <p:nvGrpSpPr>
+        <p:cNvPr id="1" name=""/>
+        <p:cNvGrpSpPr/>
+        <p:nvPr/>
+      </p:nvGrpSpPr>
+      <p:grpSpPr>
+        <a:xfrm>
+          <a:off x="0" y="0"/>
+          <a:ext cx="0" cy="0"/>
+          <a:chOff x="0" y="0"/>
+          <a:chExt cx="0" cy="0"/>
+        </a:xfrm>
+      </p:grpSpPr>
+      <p:sp>
+        <p:nvSpPr>
+          <p:cNvPr id="2" name="Slide Image Placeholder 1"/>
+          <p:cNvSpPr>
+            <a:spLocks noGrp="1"/>
+          </p:cNvSpPr>
+          <p:nvPr>
+            <p:ph type="sldImg" idx="2"/>
+          </p:nvPr>
+        </p:nvSpPr>
+        <p:spPr/>
+      </p:sp>
+      <p:sp>
+        <p:nvSpPr>
+          <p:cNvPr id="3" name="Notes Placeholder 2"/>
+          <p:cNvSpPr>
+            <a:spLocks noGrp="1"/>
+          </p:cNvSpPr>
+          <p:nvPr>
+            <p:ph type="body" idx="3" sz="quarter"/>
+          </p:nvPr>
+        </p:nvSpPr>
+        <p:spPr/>
+        <p:txBody>
+          <a:bodyPr/>
+          <a:lstStyle/>
+          <a:p>
+            <a:r>
+              <a:t>Encryption, anonymization, role-based access with MFA, regulatory compliance, and audit logging commonly combine to protect personal and proprietary data. Healthcare extracts, banking ledgers, and customer feature tables are useful only if access, retention, and sharing are controlled. Ethical nuance continues in later chapters; the point here is that protection starts when records are first stored.</a:t>
+            </a:r>
+          </a:p>
+        </p:txBody>
+      </p:sp>
+      <p:sp>
+        <p:nvSpPr>
+          <p:cNvPr id="4" name="Slide Number Placeholder 3"/>
+          <p:cNvSpPr>
+            <a:spLocks noGrp="1"/>
+          </p:cNvSpPr>
+          <p:nvPr>
+            <p:ph type="sldNum" idx="5" sz="quarter"/>
+          </p:nvPr>
+        </p:nvSpPr>
+        <p:spPr/>
+      </p:sp>
+    </p:spTree>
+  </p:cSld>
+  <p:clrMapOvr>
+    <a:masterClrMapping/>
+  </p:clrMapOvr>
+</p:notes>
+</file>
+
+<file path=ppt/notesSlides/notesSlide6.xml><?xml version="1.0" encoding="utf-8"?>
+<p:notes xmlns:a="http://schemas.openxmlformats.org/drawingml/2006/main" xmlns:p="http://schemas.openxmlformats.org/presentationml/2006/main" xmlns:r="http://schemas.openxmlformats.org/officeDocument/2006/relationships">
+  <p:cSld>
+    <p:spTree>
+      <p:nvGrpSpPr>
+        <p:cNvPr id="1" name=""/>
+        <p:cNvGrpSpPr/>
+        <p:nvPr/>
+      </p:nvGrpSpPr>
+      <p:grpSpPr>
+        <a:xfrm>
+          <a:off x="0" y="0"/>
+          <a:ext cx="0" cy="0"/>
+          <a:chOff x="0" y="0"/>
+          <a:chExt cx="0" cy="0"/>
+        </a:xfrm>
+      </p:grpSpPr>
+      <p:sp>
+        <p:nvSpPr>
+          <p:cNvPr id="2" name="Slide Image Placeholder 1"/>
+          <p:cNvSpPr>
+            <a:spLocks noGrp="1"/>
+          </p:cNvSpPr>
+          <p:nvPr>
+            <p:ph type="sldImg" idx="2"/>
+          </p:nvPr>
+        </p:nvSpPr>
+        <p:spPr/>
+      </p:sp>
+      <p:sp>
+        <p:nvSpPr>
+          <p:cNvPr id="3" name="Notes Placeholder 2"/>
+          <p:cNvSpPr>
+            <a:spLocks noGrp="1"/>
+          </p:cNvSpPr>
+          <p:nvPr>
+            <p:ph type="body" idx="3" sz="quarter"/>
+          </p:nvPr>
+        </p:nvSpPr>
+        <p:spPr/>
+        <p:txBody>
+          <a:bodyPr/>
+          <a:lstStyle/>
+          <a:p>
+            <a:r>
+              <a:t>Chapter 1 established definitions, types, quality, exploration, applications, and management. Chapter 2 turns to data collection—where records originate and how sampling shapes representativeness.</a:t>
+            </a:r>
+          </a:p>
+        </p:txBody>
+      </p:sp>
+      <p:sp>
+        <p:nvSpPr>
+          <p:cNvPr id="4" name="Slide Number Placeholder 3"/>
+          <p:cNvSpPr>
+            <a:spLocks noGrp="1"/>
+          </p:cNvSpPr>
+          <p:nvPr>
+            <p:ph type="sldNum" idx="5" sz="quarter"/>
+          </p:nvPr>
+        </p:nvSpPr>
+        <p:spPr/>
+      </p:sp>
+    </p:spTree>
+  </p:cSld>
+  <p:clrMapOvr>
+    <a:masterClrMapping/>
+  </p:clrMapOvr>
+</p:notes>
+</file>
+
+<file path=ppt/notesSlides/notesSlide7.xml><?xml version="1.0" encoding="utf-8"?>
+<p:notes xmlns:a="http://schemas.openxmlformats.org/drawingml/2006/main" xmlns:p="http://schemas.openxmlformats.org/presentationml/2006/main" xmlns:r="http://schemas.openxmlformats.org/officeDocument/2006/relationships">
+  <p:cSld>
+    <p:spTree>
+      <p:nvGrpSpPr>
+        <p:cNvPr id="1" name=""/>
+        <p:cNvGrpSpPr/>
+        <p:nvPr/>
+      </p:nvGrpSpPr>
+      <p:grpSpPr>
+        <a:xfrm>
+          <a:off x="0" y="0"/>
+          <a:ext cx="0" cy="0"/>
+          <a:chOff x="0" y="0"/>
+          <a:chExt cx="0" cy="0"/>
+        </a:xfrm>
+      </p:grpSpPr>
+      <p:sp>
+        <p:nvSpPr>
+          <p:cNvPr id="2" name="Slide Image Placeholder 1"/>
+          <p:cNvSpPr>
+            <a:spLocks noGrp="1"/>
+          </p:cNvSpPr>
+          <p:nvPr>
+            <p:ph type="sldImg" idx="2"/>
+          </p:nvPr>
+        </p:nvSpPr>
+        <p:spPr/>
+      </p:sp>
+      <p:sp>
+        <p:nvSpPr>
+          <p:cNvPr id="3" name="Notes Placeholder 2"/>
+          <p:cNvSpPr>
+            <a:spLocks noGrp="1"/>
+          </p:cNvSpPr>
+          <p:nvPr>
+            <p:ph type="body" idx="3" sz="quarter"/>
+          </p:nvPr>
+        </p:nvSpPr>
+        <p:spPr/>
+        <p:txBody>
+          <a:bodyPr/>
+          <a:lstStyle/>
+          <a:p>
+            <a:r>
+              <a:t>Management is not optional. Versioning, metadata, and access must work together. Protection begins at first storage and continues through every reuse.</a:t>
+            </a:r>
+          </a:p>
+        </p:txBody>
+      </p:sp>
+      <p:sp>
+        <p:nvSpPr>
+          <p:cNvPr id="4" name="Slide Number Placeholder 3"/>
+          <p:cNvSpPr>
+            <a:spLocks noGrp="1"/>
+          </p:cNvSpPr>
+          <p:nvPr>
+            <p:ph type="sldNum" idx="5" sz="quarter"/>
+          </p:nvPr>
+        </p:nvSpPr>
+        <p:spPr/>
+      </p:sp>
+    </p:spTree>
+  </p:cSld>
+  <p:clrMapOvr>
+    <a:masterClrMapping/>
+  </p:clrMapOvr>
+</p:notes>
+</file>
+
+<file path=ppt/notesSlides/notesSlide8.xml><?xml version="1.0" encoding="utf-8"?>
+<p:notes xmlns:a="http://schemas.openxmlformats.org/drawingml/2006/main" xmlns:p="http://schemas.openxmlformats.org/presentationml/2006/main" xmlns:r="http://schemas.openxmlformats.org/officeDocument/2006/relationships">
+  <p:cSld>
+    <p:spTree>
+      <p:nvGrpSpPr>
+        <p:cNvPr id="1" name=""/>
+        <p:cNvGrpSpPr/>
+        <p:nvPr/>
+      </p:nvGrpSpPr>
+      <p:grpSpPr>
+        <a:xfrm>
+          <a:off x="0" y="0"/>
+          <a:ext cx="0" cy="0"/>
+          <a:chOff x="0" y="0"/>
+          <a:chExt cx="0" cy="0"/>
+        </a:xfrm>
+      </p:grpSpPr>
+      <p:sp>
+        <p:nvSpPr>
+          <p:cNvPr id="2" name="Slide Image Placeholder 1"/>
+          <p:cNvSpPr>
+            <a:spLocks noGrp="1"/>
+          </p:cNvSpPr>
+          <p:nvPr>
+            <p:ph type="sldImg" idx="2"/>
+          </p:nvPr>
+        </p:nvSpPr>
+        <p:spPr/>
+      </p:sp>
+      <p:sp>
+        <p:nvSpPr>
+          <p:cNvPr id="3" name="Notes Placeholder 2"/>
+          <p:cNvSpPr>
+            <a:spLocks noGrp="1"/>
+          </p:cNvSpPr>
+          <p:nvPr>
+            <p:ph type="body" idx="3" sz="quarter"/>
+          </p:nvPr>
+        </p:nvSpPr>
+        <p:spPr/>
+        <p:txBody>
+          <a:bodyPr/>
+          <a:lstStyle/>
+          <a:p>
+            <a:r>
+              <a:t>Complete the quiz, then return to the chapter learning path or continue to Chapter 2 when that lecture is available.</a:t>
+            </a:r>
+          </a:p>
+        </p:txBody>
+      </p:sp>
+      <p:sp>
+        <p:nvSpPr>
+          <p:cNvPr id="4" name="Slide Number Placeholder 3"/>
+          <p:cNvSpPr>
+            <a:spLocks noGrp="1"/>
+          </p:cNvSpPr>
+          <p:nvPr>
+            <p:ph type="sldNum" idx="5" sz="quarter"/>
+          </p:nvPr>
+        </p:nvSpPr>
+        <p:spPr/>
+      </p:sp>
+    </p:spTree>
+  </p:cSld>
+  <p:clrMapOvr>
+    <a:masterClrMapping/>
+  </p:clrMapOvr>
+</p:notes>
 </file>
 
 <file path=ppt/slideLayouts/slideLayout1.xml><?xml version="1.0" encoding="utf-8"?>
@@ -3150,7 +4061,7 @@
                 </a:solidFill>
                 <a:latin typeface="Calibri"/>
               </a:rPr>
-              <a:t>Keep datasets trustworthy as they are stored, shared, and reused</a:t>
+              <a:t>Models and dashboards depend on quieter work</a:t>
             </a:r>
           </a:p>
         </p:txBody>
@@ -3189,7 +4100,7 @@
               </a:defRPr>
             </a:pPr>
             <a:r>
-              <a:t>Chapter 1 — Dataset Management</a:t>
+              <a:t>Chapter 1 — 07 Dataset Management</a:t>
             </a:r>
           </a:p>
         </p:txBody>
@@ -3274,12 +4185,13 @@
           <a:lstStyle/>
           <a:p>
             <a:pPr>
+              <a:spcAft>
+                <a:spcPts val="1000"/>
+              </a:spcAft>
+              <a:buChar char="•"/>
               <a:lnSpc>
                 <a:spcPts val="2200"/>
               </a:lnSpc>
-              <a:spcAft>
-                <a:spcPts val="1000"/>
-              </a:spcAft>
             </a:pPr>
             <a:r>
               <a:rPr sz="2000" b="0">
@@ -3288,17 +4200,18 @@
                 </a:solidFill>
                 <a:latin typeface="Calibri"/>
               </a:rPr>
-              <a:t>• Explain why management matters after models ship</a:t>
+              <a:t>Explain why management matters after a model ships</a:t>
             </a:r>
           </a:p>
           <a:p>
             <a:pPr>
+              <a:spcAft>
+                <a:spcPts val="1000"/>
+              </a:spcAft>
+              <a:buChar char="•"/>
               <a:lnSpc>
                 <a:spcPts val="2200"/>
               </a:lnSpc>
-              <a:spcAft>
-                <a:spcPts val="1000"/>
-              </a:spcAft>
             </a:pPr>
             <a:r>
               <a:rPr sz="2000" b="0">
@@ -3307,64 +4220,7 @@
                 </a:solidFill>
                 <a:latin typeface="Calibri"/>
               </a:rPr>
-              <a:t>• List core management practices (versioning,</a:t>
-            </a:r>
-          </a:p>
-          <a:p>
-            <a:pPr>
-              <a:lnSpc>
-                <a:spcPts val="2200"/>
-              </a:lnSpc>
-              <a:spcAft>
-                <a:spcPts val="1000"/>
-              </a:spcAft>
-            </a:pPr>
-            <a:r>
-              <a:rPr sz="2000" b="0">
-                <a:solidFill>
-                  <a:srgbClr val="333333"/>
-                </a:solidFill>
-                <a:latin typeface="Calibri"/>
-              </a:rPr>
-              <a:t>      metadata, access, catalog)</a:t>
-            </a:r>
-          </a:p>
-          <a:p>
-            <a:pPr>
-              <a:lnSpc>
-                <a:spcPts val="2200"/>
-              </a:lnSpc>
-              <a:spcAft>
-                <a:spcPts val="1000"/>
-              </a:spcAft>
-            </a:pPr>
-            <a:r>
-              <a:rPr sz="2000" b="0">
-                <a:solidFill>
-                  <a:srgbClr val="333333"/>
-                </a:solidFill>
-                <a:latin typeface="Calibri"/>
-              </a:rPr>
-              <a:t>• Name privacy and security controls that protect</a:t>
-            </a:r>
-          </a:p>
-          <a:p>
-            <a:pPr>
-              <a:lnSpc>
-                <a:spcPts val="2200"/>
-              </a:lnSpc>
-              <a:spcAft>
-                <a:spcPts val="1000"/>
-              </a:spcAft>
-            </a:pPr>
-            <a:r>
-              <a:rPr sz="2000" b="0">
-                <a:solidFill>
-                  <a:srgbClr val="333333"/>
-                </a:solidFill>
-                <a:latin typeface="Calibri"/>
-              </a:rPr>
-              <a:t>      sensitive tables</a:t>
+              <a:t>Name privacy controls that protect sensitive extracts</a:t>
             </a:r>
           </a:p>
         </p:txBody>
@@ -3403,7 +4259,7 @@
               </a:defRPr>
             </a:pPr>
             <a:r>
-              <a:t>Chapter 1 — Dataset Management</a:t>
+              <a:t>Chapter 1 — 07 Dataset Management</a:t>
             </a:r>
           </a:p>
         </p:txBody>
@@ -3488,12 +4344,13 @@
           <a:lstStyle/>
           <a:p>
             <a:pPr>
+              <a:spcAft>
+                <a:spcPts val="1000"/>
+              </a:spcAft>
+              <a:buChar char="•"/>
               <a:lnSpc>
                 <a:spcPts val="2200"/>
               </a:lnSpc>
-              <a:spcAft>
-                <a:spcPts val="1000"/>
-              </a:spcAft>
             </a:pPr>
             <a:r>
               <a:rPr sz="2000" b="0">
@@ -3502,17 +4359,18 @@
                 </a:solidFill>
                 <a:latin typeface="Calibri"/>
               </a:rPr>
-              <a:t>• Quiet work: access, versions, backups, retention</a:t>
+              <a:t>A dataset is collected, cleaned, documented, stored, shared, and sometimes retired</a:t>
             </a:r>
           </a:p>
           <a:p>
             <a:pPr>
+              <a:spcAft>
+                <a:spcPts val="1000"/>
+              </a:spcAft>
+              <a:buChar char="•"/>
               <a:lnSpc>
                 <a:spcPts val="2200"/>
               </a:lnSpc>
-              <a:spcAft>
-                <a:spcPts val="1000"/>
-              </a:spcAft>
             </a:pPr>
             <a:r>
               <a:rPr sz="2000" b="0">
@@ -3521,17 +4379,18 @@
                 </a:solidFill>
                 <a:latin typeface="Calibri"/>
               </a:rPr>
-              <a:t>• Traceability for audits and collaboration</a:t>
+              <a:t>Traceability links figures to their sources</a:t>
             </a:r>
           </a:p>
           <a:p>
             <a:pPr>
+              <a:spcAft>
+                <a:spcPts val="1000"/>
+              </a:spcAft>
+              <a:buChar char="•"/>
               <a:lnSpc>
                 <a:spcPts val="2200"/>
               </a:lnSpc>
-              <a:spcAft>
-                <a:spcPts val="1000"/>
-              </a:spcAft>
             </a:pPr>
             <a:r>
               <a:rPr sz="2000" b="0">
@@ -3540,45 +4399,7 @@
                 </a:solidFill>
                 <a:latin typeface="Calibri"/>
               </a:rPr>
-              <a:t>• Prevents undocumented preprocessing from poisoning</a:t>
-            </a:r>
-          </a:p>
-          <a:p>
-            <a:pPr>
-              <a:lnSpc>
-                <a:spcPts val="2200"/>
-              </a:lnSpc>
-              <a:spcAft>
-                <a:spcPts val="1000"/>
-              </a:spcAft>
-            </a:pPr>
-            <a:r>
-              <a:rPr sz="2000" b="0">
-                <a:solidFill>
-                  <a:srgbClr val="333333"/>
-                </a:solidFill>
-                <a:latin typeface="Calibri"/>
-              </a:rPr>
-              <a:t>      models</a:t>
-            </a:r>
-          </a:p>
-          <a:p>
-            <a:pPr>
-              <a:lnSpc>
-                <a:spcPts val="2200"/>
-              </a:lnSpc>
-              <a:spcAft>
-                <a:spcPts val="1000"/>
-              </a:spcAft>
-            </a:pPr>
-            <a:r>
-              <a:rPr sz="2000" b="0">
-                <a:solidFill>
-                  <a:srgbClr val="333333"/>
-                </a:solidFill>
-                <a:latin typeface="Calibri"/>
-              </a:rPr>
-              <a:t>• Protects the investment in collection and quality</a:t>
+              <a:t>Without these foundations</a:t>
             </a:r>
           </a:p>
         </p:txBody>
@@ -3617,7 +4438,7 @@
               </a:defRPr>
             </a:pPr>
             <a:r>
-              <a:t>Chapter 1 — Dataset Management</a:t>
+              <a:t>Chapter 1 — 07 Dataset Management</a:t>
             </a:r>
           </a:p>
         </p:txBody>
@@ -3702,12 +4523,13 @@
           <a:lstStyle/>
           <a:p>
             <a:pPr>
+              <a:spcAft>
+                <a:spcPts val="1000"/>
+              </a:spcAft>
+              <a:buChar char="•"/>
               <a:lnSpc>
                 <a:spcPts val="2200"/>
               </a:lnSpc>
-              <a:spcAft>
-                <a:spcPts val="1000"/>
-              </a:spcAft>
             </a:pPr>
             <a:r>
               <a:rPr sz="2000" b="0">
@@ -3716,17 +4538,18 @@
                 </a:solidFill>
                 <a:latin typeface="Calibri"/>
               </a:rPr>
-              <a:t>• Version control for evolving extracts</a:t>
+              <a:t>Table 1.8 highlights version control</a:t>
             </a:r>
           </a:p>
           <a:p>
             <a:pPr>
+              <a:spcAft>
+                <a:spcPts val="1000"/>
+              </a:spcAft>
+              <a:buChar char="•"/>
               <a:lnSpc>
                 <a:spcPts val="2200"/>
               </a:lnSpc>
-              <a:spcAft>
-                <a:spcPts val="1000"/>
-              </a:spcAft>
             </a:pPr>
             <a:r>
               <a:rPr sz="2000" b="0">
@@ -3735,45 +4558,7 @@
                 </a:solidFill>
                 <a:latin typeface="Calibri"/>
               </a:rPr>
-              <a:t>• Cleaning and transformation with clear schemas</a:t>
-            </a:r>
-          </a:p>
-          <a:p>
-            <a:pPr>
-              <a:lnSpc>
-                <a:spcPts val="2200"/>
-              </a:lnSpc>
-              <a:spcAft>
-                <a:spcPts val="1000"/>
-              </a:spcAft>
-            </a:pPr>
-            <a:r>
-              <a:rPr sz="2000" b="0">
-                <a:solidFill>
-                  <a:srgbClr val="333333"/>
-                </a:solidFill>
-                <a:latin typeface="Calibri"/>
-              </a:rPr>
-              <a:t>• Metadata documentation and data catalogs</a:t>
-            </a:r>
-          </a:p>
-          <a:p>
-            <a:pPr>
-              <a:lnSpc>
-                <a:spcPts val="2200"/>
-              </a:lnSpc>
-              <a:spcAft>
-                <a:spcPts val="1000"/>
-              </a:spcAft>
-            </a:pPr>
-            <a:r>
-              <a:rPr sz="2000" b="0">
-                <a:solidFill>
-                  <a:srgbClr val="333333"/>
-                </a:solidFill>
-                <a:latin typeface="Calibri"/>
-              </a:rPr>
-              <a:t>• Storage, backups, and role-based access control</a:t>
+              <a:t>These reinforce one another</a:t>
             </a:r>
           </a:p>
         </p:txBody>
@@ -3812,7 +4597,7 @@
               </a:defRPr>
             </a:pPr>
             <a:r>
-              <a:t>Chapter 1 — Dataset Management</a:t>
+              <a:t>Chapter 1 — 07 Dataset Management</a:t>
             </a:r>
           </a:p>
         </p:txBody>
@@ -3897,12 +4682,13 @@
           <a:lstStyle/>
           <a:p>
             <a:pPr>
+              <a:spcAft>
+                <a:spcPts val="1000"/>
+              </a:spcAft>
+              <a:buChar char="•"/>
               <a:lnSpc>
                 <a:spcPts val="2200"/>
               </a:lnSpc>
-              <a:spcAft>
-                <a:spcPts val="1000"/>
-              </a:spcAft>
             </a:pPr>
             <a:r>
               <a:rPr sz="2000" b="0">
@@ -3911,17 +4697,18 @@
                 </a:solidFill>
                 <a:latin typeface="Calibri"/>
               </a:rPr>
-              <a:t>• Encryption at rest and in transit</a:t>
+              <a:t>Encryption, anonymization, role-based access with MFA, regulatory compliance</a:t>
             </a:r>
           </a:p>
           <a:p>
             <a:pPr>
+              <a:spcAft>
+                <a:spcPts val="1000"/>
+              </a:spcAft>
+              <a:buChar char="•"/>
               <a:lnSpc>
                 <a:spcPts val="2200"/>
               </a:lnSpc>
-              <a:spcAft>
-                <a:spcPts val="1000"/>
-              </a:spcAft>
             </a:pPr>
             <a:r>
               <a:rPr sz="2000" b="0">
@@ -3930,17 +4717,18 @@
                 </a:solidFill>
                 <a:latin typeface="Calibri"/>
               </a:rPr>
-              <a:t>• Anonymization / de-identification for sharing</a:t>
+              <a:t>Healthcare extracts, banking ledgers</a:t>
             </a:r>
           </a:p>
           <a:p>
             <a:pPr>
+              <a:spcAft>
+                <a:spcPts val="1000"/>
+              </a:spcAft>
+              <a:buChar char="•"/>
               <a:lnSpc>
                 <a:spcPts val="2200"/>
               </a:lnSpc>
-              <a:spcAft>
-                <a:spcPts val="1000"/>
-              </a:spcAft>
             </a:pPr>
             <a:r>
               <a:rPr sz="2000" b="0">
@@ -3949,26 +4737,7 @@
                 </a:solidFill>
                 <a:latin typeface="Calibri"/>
               </a:rPr>
-              <a:t>• MFA and role-based access</a:t>
-            </a:r>
-          </a:p>
-          <a:p>
-            <a:pPr>
-              <a:lnSpc>
-                <a:spcPts val="2200"/>
-              </a:lnSpc>
-              <a:spcAft>
-                <a:spcPts val="1000"/>
-              </a:spcAft>
-            </a:pPr>
-            <a:r>
-              <a:rPr sz="2000" b="0">
-                <a:solidFill>
-                  <a:srgbClr val="333333"/>
-                </a:solidFill>
-                <a:latin typeface="Calibri"/>
-              </a:rPr>
-              <a:t>• Compliance (e.g., GDPR, HIPAA) plus audit logging</a:t>
+              <a:t>Ethical nuance continues in later chapters</a:t>
             </a:r>
           </a:p>
         </p:txBody>
@@ -4007,7 +4776,7 @@
               </a:defRPr>
             </a:pPr>
             <a:r>
-              <a:t>Chapter 1 — Dataset Management</a:t>
+              <a:t>Chapter 1 — 07 Dataset Management</a:t>
             </a:r>
           </a:p>
         </p:txBody>
@@ -4092,12 +4861,13 @@
           <a:lstStyle/>
           <a:p>
             <a:pPr>
+              <a:spcAft>
+                <a:spcPts val="1000"/>
+              </a:spcAft>
+              <a:buChar char="•"/>
               <a:lnSpc>
                 <a:spcPts val="2200"/>
               </a:lnSpc>
-              <a:spcAft>
-                <a:spcPts val="1000"/>
-              </a:spcAft>
             </a:pPr>
             <a:r>
               <a:rPr sz="2000" b="0">
@@ -4106,17 +4876,18 @@
                 </a:solidFill>
                 <a:latin typeface="Calibri"/>
               </a:rPr>
-              <a:t>• This chapter: what datasets are and how to use them</a:t>
+              <a:t>Chapter 1 established definitions, types, quality, exploration, applications</a:t>
             </a:r>
           </a:p>
           <a:p>
             <a:pPr>
+              <a:spcAft>
+                <a:spcPts val="1000"/>
+              </a:spcAft>
+              <a:buChar char="•"/>
               <a:lnSpc>
                 <a:spcPts val="2200"/>
               </a:lnSpc>
-              <a:spcAft>
-                <a:spcPts val="1000"/>
-              </a:spcAft>
             </a:pPr>
             <a:r>
               <a:rPr sz="2000" b="0">
@@ -4125,64 +4896,7 @@
                 </a:solidFill>
                 <a:latin typeface="Calibri"/>
               </a:rPr>
-              <a:t>      responsibly</a:t>
-            </a:r>
-          </a:p>
-          <a:p>
-            <a:pPr>
-              <a:lnSpc>
-                <a:spcPts val="2200"/>
-              </a:lnSpc>
-              <a:spcAft>
-                <a:spcPts val="1000"/>
-              </a:spcAft>
-            </a:pPr>
-            <a:r>
-              <a:rPr sz="2000" b="0">
-                <a:solidFill>
-                  <a:srgbClr val="333333"/>
-                </a:solidFill>
-                <a:latin typeface="Calibri"/>
-              </a:rPr>
-              <a:t>• Next: Chapter 2 — how records are collected</a:t>
-            </a:r>
-          </a:p>
-          <a:p>
-            <a:pPr>
-              <a:lnSpc>
-                <a:spcPts val="2200"/>
-              </a:lnSpc>
-              <a:spcAft>
-                <a:spcPts val="1000"/>
-              </a:spcAft>
-            </a:pPr>
-            <a:r>
-              <a:rPr sz="2000" b="0">
-                <a:solidFill>
-                  <a:srgbClr val="333333"/>
-                </a:solidFill>
-                <a:latin typeface="Calibri"/>
-              </a:rPr>
-              <a:t>• Management depth continues in later chapters</a:t>
-            </a:r>
-          </a:p>
-          <a:p>
-            <a:pPr>
-              <a:lnSpc>
-                <a:spcPts val="2200"/>
-              </a:lnSpc>
-              <a:spcAft>
-                <a:spcPts val="1000"/>
-              </a:spcAft>
-            </a:pPr>
-            <a:r>
-              <a:rPr sz="2000" b="0">
-                <a:solidFill>
-                  <a:srgbClr val="333333"/>
-                </a:solidFill>
-                <a:latin typeface="Calibri"/>
-              </a:rPr>
-              <a:t>      (privacy, docs, storage)</a:t>
+              <a:t>Chapter 2 turns to data collection</a:t>
             </a:r>
           </a:p>
         </p:txBody>
@@ -4221,7 +4935,7 @@
               </a:defRPr>
             </a:pPr>
             <a:r>
-              <a:t>Chapter 1 — Dataset Management</a:t>
+              <a:t>Chapter 1 — 07 Dataset Management</a:t>
             </a:r>
           </a:p>
         </p:txBody>
@@ -4306,12 +5020,13 @@
           <a:lstStyle/>
           <a:p>
             <a:pPr>
+              <a:spcAft>
+                <a:spcPts val="1000"/>
+              </a:spcAft>
+              <a:buChar char="•"/>
               <a:lnSpc>
                 <a:spcPts val="2200"/>
               </a:lnSpc>
-              <a:spcAft>
-                <a:spcPts val="1000"/>
-              </a:spcAft>
             </a:pPr>
             <a:r>
               <a:rPr sz="2000" b="0">
@@ -4320,17 +5035,18 @@
                 </a:solidFill>
                 <a:latin typeface="Calibri"/>
               </a:rPr>
-              <a:t>• Management is not an optional add-on</a:t>
+              <a:t>Management is not optional</a:t>
             </a:r>
           </a:p>
           <a:p>
             <a:pPr>
+              <a:spcAft>
+                <a:spcPts val="1000"/>
+              </a:spcAft>
+              <a:buChar char="•"/>
               <a:lnSpc>
                 <a:spcPts val="2200"/>
               </a:lnSpc>
-              <a:spcAft>
-                <a:spcPts val="1000"/>
-              </a:spcAft>
             </a:pPr>
             <a:r>
               <a:rPr sz="2000" b="0">
@@ -4339,17 +5055,18 @@
                 </a:solidFill>
                 <a:latin typeface="Calibri"/>
               </a:rPr>
-              <a:t>• Versioning + metadata + access must work together</a:t>
+              <a:t>Versioning, metadata, and access must work together</a:t>
             </a:r>
           </a:p>
           <a:p>
             <a:pPr>
+              <a:spcAft>
+                <a:spcPts val="1000"/>
+              </a:spcAft>
+              <a:buChar char="•"/>
               <a:lnSpc>
                 <a:spcPts val="2200"/>
               </a:lnSpc>
-              <a:spcAft>
-                <a:spcPts val="1000"/>
-              </a:spcAft>
             </a:pPr>
             <a:r>
               <a:rPr sz="2000" b="0">
@@ -4358,7 +5075,7 @@
                 </a:solidFill>
                 <a:latin typeface="Calibri"/>
               </a:rPr>
-              <a:t>• Protection begins when records are first stored</a:t>
+              <a:t>Protection begins at first storage and continues through every reuse</a:t>
             </a:r>
           </a:p>
         </p:txBody>
@@ -4397,7 +5114,166 @@
               </a:defRPr>
             </a:pPr>
             <a:r>
-              <a:t>Chapter 1 — Dataset Management</a:t>
+              <a:t>Chapter 1 — 07 Dataset Management</a:t>
+            </a:r>
+          </a:p>
+        </p:txBody>
+      </p:sp>
+    </p:spTree>
+  </p:cSld>
+  <p:clrMapOvr>
+    <a:masterClrMapping/>
+  </p:clrMapOvr>
+</p:sld>
+</file>
+
+<file path=ppt/slides/slide8.xml><?xml version="1.0" encoding="utf-8"?>
+<p:sld xmlns:a="http://schemas.openxmlformats.org/drawingml/2006/main" xmlns:p="http://schemas.openxmlformats.org/presentationml/2006/main" xmlns:r="http://schemas.openxmlformats.org/officeDocument/2006/relationships">
+  <p:cSld>
+    <p:spTree>
+      <p:nvGrpSpPr>
+        <p:cNvPr id="1" name=""/>
+        <p:cNvGrpSpPr/>
+        <p:nvPr/>
+      </p:nvGrpSpPr>
+      <p:grpSpPr/>
+      <p:sp>
+        <p:nvSpPr>
+          <p:cNvPr id="2" name="TextBox 1"/>
+          <p:cNvSpPr txBox="1"/>
+          <p:nvPr/>
+        </p:nvSpPr>
+        <p:spPr>
+          <a:xfrm>
+            <a:off x="548640" y="411480"/>
+            <a:ext cx="11064240" cy="777240"/>
+          </a:xfrm>
+          <a:prstGeom prst="rect">
+            <a:avLst/>
+          </a:prstGeom>
+          <a:noFill/>
+        </p:spPr>
+        <p:txBody>
+          <a:bodyPr wrap="square">
+            <a:noAutofit/>
+          </a:bodyPr>
+          <a:lstStyle/>
+          <a:p>
+            <a:pPr>
+              <a:lnSpc>
+                <a:spcPts val="2200"/>
+              </a:lnSpc>
+            </a:pPr>
+            <a:r>
+              <a:rPr sz="2800" b="1">
+                <a:solidFill>
+                  <a:srgbClr val="1A1A2E"/>
+                </a:solidFill>
+                <a:latin typeface="Calibri"/>
+              </a:rPr>
+              <a:t>Next</a:t>
+            </a:r>
+          </a:p>
+        </p:txBody>
+      </p:sp>
+      <p:sp>
+        <p:nvSpPr>
+          <p:cNvPr id="3" name="TextBox 2"/>
+          <p:cNvSpPr txBox="1"/>
+          <p:nvPr/>
+        </p:nvSpPr>
+        <p:spPr>
+          <a:xfrm>
+            <a:off x="548640" y="1234440"/>
+            <a:ext cx="11064240" cy="4937760"/>
+          </a:xfrm>
+          <a:prstGeom prst="rect">
+            <a:avLst/>
+          </a:prstGeom>
+          <a:noFill/>
+        </p:spPr>
+        <p:txBody>
+          <a:bodyPr wrap="square">
+            <a:noAutofit/>
+          </a:bodyPr>
+          <a:lstStyle/>
+          <a:p>
+            <a:pPr>
+              <a:spcAft>
+                <a:spcPts val="1000"/>
+              </a:spcAft>
+              <a:buChar char="•"/>
+              <a:lnSpc>
+                <a:spcPts val="2200"/>
+              </a:lnSpc>
+            </a:pPr>
+            <a:r>
+              <a:rPr sz="2000" b="0">
+                <a:solidFill>
+                  <a:srgbClr val="333333"/>
+                </a:solidFill>
+                <a:latin typeface="Calibri"/>
+              </a:rPr>
+              <a:t>Complete the quiz for this clip</a:t>
+            </a:r>
+          </a:p>
+          <a:p>
+            <a:pPr>
+              <a:spcAft>
+                <a:spcPts val="1000"/>
+              </a:spcAft>
+              <a:buChar char="•"/>
+              <a:lnSpc>
+                <a:spcPts val="2200"/>
+              </a:lnSpc>
+            </a:pPr>
+            <a:r>
+              <a:rPr sz="2000" b="0">
+                <a:solidFill>
+                  <a:srgbClr val="333333"/>
+                </a:solidFill>
+                <a:latin typeface="Calibri"/>
+              </a:rPr>
+              <a:t>Complete the quiz</a:t>
+            </a:r>
+          </a:p>
+        </p:txBody>
+      </p:sp>
+      <p:sp>
+        <p:nvSpPr>
+          <p:cNvPr id="4" name="TextBox 3"/>
+          <p:cNvSpPr txBox="1"/>
+          <p:nvPr/>
+        </p:nvSpPr>
+        <p:spPr>
+          <a:xfrm>
+            <a:off x="548640" y="6355080"/>
+            <a:ext cx="11064240" cy="320040"/>
+          </a:xfrm>
+          <a:prstGeom prst="rect">
+            <a:avLst/>
+          </a:prstGeom>
+          <a:noFill/>
+        </p:spPr>
+        <p:txBody>
+          <a:bodyPr wrap="square">
+            <a:noAutofit/>
+          </a:bodyPr>
+          <a:lstStyle/>
+          <a:p>
+            <a:pPr algn="r">
+              <a:lnSpc>
+                <a:spcPts val="2200"/>
+              </a:lnSpc>
+              <a:defRPr sz="1000" b="0">
+                <a:solidFill>
+                  <a:srgbClr val="666666"/>
+                </a:solidFill>
+                <a:latin typeface="Calibri"/>
+              </a:defRPr>
+            </a:pPr>
+            <a:r>
+              <a:t>Chapter 1 — 07 Dataset Management</a:t>
             </a:r>
           </a:p>
         </p:txBody>
@@ -4728,4 +5604,324 @@
   </a:objectDefaults>
   <a:extraClrSchemeLst/>
 </a:theme>
+</file>
+
+<file path=ppt/theme/theme2.xml><?xml version="1.0" encoding="utf-8"?>
+<a:theme xmlns:a="http://schemas.openxmlformats.org/drawingml/2006/main" name="Office Theme">
+  <a:themeElements>
+    <a:clrScheme name="Office">
+      <a:dk1>
+        <a:sysClr val="windowText" lastClr="000000"/>
+      </a:dk1>
+      <a:lt1>
+        <a:sysClr val="window" lastClr="FFFFFF"/>
+      </a:lt1>
+      <a:dk2>
+        <a:srgbClr val="1F497D"/>
+      </a:dk2>
+      <a:lt2>
+        <a:srgbClr val="EEECE1"/>
+      </a:lt2>
+      <a:accent1>
+        <a:srgbClr val="4F81BD"/>
+      </a:accent1>
+      <a:accent2>
+        <a:srgbClr val="C0504D"/>
+      </a:accent2>
+      <a:accent3>
+        <a:srgbClr val="9BBB59"/>
+      </a:accent3>
+      <a:accent4>
+        <a:srgbClr val="8064A2"/>
+      </a:accent4>
+      <a:accent5>
+        <a:srgbClr val="4BACC6"/>
+      </a:accent5>
+      <a:accent6>
+        <a:srgbClr val="F79646"/>
+      </a:accent6>
+      <a:hlink>
+        <a:srgbClr val="0000FF"/>
+      </a:hlink>
+      <a:folHlink>
+        <a:srgbClr val="800080"/>
+      </a:folHlink>
+    </a:clrScheme>
+    <a:fontScheme name="Office">
+      <a:majorFont>
+        <a:latin typeface="Calibri"/>
+        <a:ea typeface=""/>
+        <a:cs typeface=""/>
+        <a:font script="Jpan" typeface="ＭＳ Ｐゴシック"/>
+        <a:font script="Hang" typeface="맑은 고딕"/>
+        <a:font script="Hans" typeface="宋体"/>
+        <a:font script="Hant" typeface="新細明體"/>
+        <a:font script="Arab" typeface="Times New Roman"/>
+        <a:font script="Hebr" typeface="Times New Roman"/>
+        <a:font script="Thai" typeface="Angsana New"/>
+        <a:font script="Ethi" typeface="Nyala"/>
+        <a:font script="Beng" typeface="Vrinda"/>
+        <a:font script="Gujr" typeface="Shruti"/>
+        <a:font script="Khmr" typeface="MoolBoran"/>
+        <a:font script="Knda" typeface="Tunga"/>
+        <a:font script="Guru" typeface="Raavi"/>
+        <a:font script="Cans" typeface="Euphemia"/>
+        <a:font script="Cher" typeface="Plantagenet Cherokee"/>
+        <a:font script="Yiii" typeface="Microsoft Yi Baiti"/>
+        <a:font script="Tibt" typeface="Microsoft Himalaya"/>
+        <a:font script="Thaa" typeface="MV Boli"/>
+        <a:font script="Deva" typeface="Mangal"/>
+        <a:font script="Telu" typeface="Gautami"/>
+        <a:font script="Taml" typeface="Latha"/>
+        <a:font script="Syrc" typeface="Estrangelo Edessa"/>
+        <a:font script="Orya" typeface="Kalinga"/>
+        <a:font script="Mlym" typeface="Kartika"/>
+        <a:font script="Laoo" typeface="DokChampa"/>
+        <a:font script="Sinh" typeface="Iskoola Pota"/>
+        <a:font script="Mong" typeface="Mongolian Baiti"/>
+        <a:font script="Viet" typeface="Times New Roman"/>
+        <a:font script="Uigh" typeface="Microsoft Uighur"/>
+        <a:font script="Geor" typeface="Sylfaen"/>
+      </a:majorFont>
+      <a:minorFont>
+        <a:latin typeface="Calibri"/>
+        <a:ea typeface=""/>
+        <a:cs typeface=""/>
+        <a:font script="Jpan" typeface="ＭＳ Ｐゴシック"/>
+        <a:font script="Hang" typeface="맑은 고딕"/>
+        <a:font script="Hans" typeface="宋体"/>
+        <a:font script="Hant" typeface="新細明體"/>
+        <a:font script="Arab" typeface="Arial"/>
+        <a:font script="Hebr" typeface="Arial"/>
+        <a:font script="Thai" typeface="Cordia New"/>
+        <a:font script="Ethi" typeface="Nyala"/>
+        <a:font script="Beng" typeface="Vrinda"/>
+        <a:font script="Gujr" typeface="Shruti"/>
+        <a:font script="Khmr" typeface="DaunPenh"/>
+        <a:font script="Knda" typeface="Tunga"/>
+        <a:font script="Guru" typeface="Raavi"/>
+        <a:font script="Cans" typeface="Euphemia"/>
+        <a:font script="Cher" typeface="Plantagenet Cherokee"/>
+        <a:font script="Yiii" typeface="Microsoft Yi Baiti"/>
+        <a:font script="Tibt" typeface="Microsoft Himalaya"/>
+        <a:font script="Thaa" typeface="MV Boli"/>
+        <a:font script="Deva" typeface="Mangal"/>
+        <a:font script="Telu" typeface="Gautami"/>
+        <a:font script="Taml" typeface="Latha"/>
+        <a:font script="Syrc" typeface="Estrangelo Edessa"/>
+        <a:font script="Orya" typeface="Kalinga"/>
+        <a:font script="Mlym" typeface="Kartika"/>
+        <a:font script="Laoo" typeface="DokChampa"/>
+        <a:font script="Sinh" typeface="Iskoola Pota"/>
+        <a:font script="Mong" typeface="Mongolian Baiti"/>
+        <a:font script="Viet" typeface="Arial"/>
+        <a:font script="Uigh" typeface="Microsoft Uighur"/>
+        <a:font script="Geor" typeface="Sylfaen"/>
+      </a:minorFont>
+    </a:fontScheme>
+    <a:fmtScheme name="Office">
+      <a:fillStyleLst>
+        <a:solidFill>
+          <a:schemeClr val="phClr"/>
+        </a:solidFill>
+        <a:gradFill rotWithShape="1">
+          <a:gsLst>
+            <a:gs pos="0">
+              <a:schemeClr val="phClr">
+                <a:tint val="50000"/>
+                <a:satMod val="300000"/>
+              </a:schemeClr>
+            </a:gs>
+            <a:gs pos="35000">
+              <a:schemeClr val="phClr">
+                <a:tint val="37000"/>
+                <a:satMod val="300000"/>
+              </a:schemeClr>
+            </a:gs>
+            <a:gs pos="100000">
+              <a:schemeClr val="phClr">
+                <a:tint val="15000"/>
+                <a:satMod val="350000"/>
+              </a:schemeClr>
+            </a:gs>
+          </a:gsLst>
+          <a:lin ang="16200000" scaled="1"/>
+        </a:gradFill>
+        <a:gradFill rotWithShape="1">
+          <a:gsLst>
+            <a:gs pos="0">
+              <a:schemeClr val="phClr">
+                <a:tint val="100000"/>
+                <a:shade val="100000"/>
+                <a:satMod val="130000"/>
+              </a:schemeClr>
+            </a:gs>
+            <a:gs pos="100000">
+              <a:schemeClr val="phClr">
+                <a:tint val="50000"/>
+                <a:shade val="100000"/>
+                <a:satMod val="350000"/>
+              </a:schemeClr>
+            </a:gs>
+          </a:gsLst>
+          <a:lin ang="16200000" scaled="0"/>
+        </a:gradFill>
+      </a:fillStyleLst>
+      <a:lnStyleLst>
+        <a:ln w="9525" cap="flat" cmpd="sng" algn="ctr">
+          <a:solidFill>
+            <a:schemeClr val="phClr">
+              <a:shade val="95000"/>
+              <a:satMod val="105000"/>
+            </a:schemeClr>
+          </a:solidFill>
+          <a:prstDash val="solid"/>
+        </a:ln>
+        <a:ln w="25400" cap="flat" cmpd="sng" algn="ctr">
+          <a:solidFill>
+            <a:schemeClr val="phClr"/>
+          </a:solidFill>
+          <a:prstDash val="solid"/>
+        </a:ln>
+        <a:ln w="38100" cap="flat" cmpd="sng" algn="ctr">
+          <a:solidFill>
+            <a:schemeClr val="phClr"/>
+          </a:solidFill>
+          <a:prstDash val="solid"/>
+        </a:ln>
+      </a:lnStyleLst>
+      <a:effectStyleLst>
+        <a:effectStyle>
+          <a:effectLst>
+            <a:outerShdw blurRad="40000" dist="20000" dir="5400000" rotWithShape="0">
+              <a:srgbClr val="000000">
+                <a:alpha val="38000"/>
+              </a:srgbClr>
+            </a:outerShdw>
+          </a:effectLst>
+        </a:effectStyle>
+        <a:effectStyle>
+          <a:effectLst>
+            <a:outerShdw blurRad="40000" dist="23000" dir="5400000" rotWithShape="0">
+              <a:srgbClr val="000000">
+                <a:alpha val="35000"/>
+              </a:srgbClr>
+            </a:outerShdw>
+          </a:effectLst>
+        </a:effectStyle>
+        <a:effectStyle>
+          <a:effectLst>
+            <a:outerShdw blurRad="40000" dist="23000" dir="5400000" rotWithShape="0">
+              <a:srgbClr val="000000">
+                <a:alpha val="35000"/>
+              </a:srgbClr>
+            </a:outerShdw>
+          </a:effectLst>
+          <a:scene3d>
+            <a:camera prst="orthographicFront">
+              <a:rot lat="0" lon="0" rev="0"/>
+            </a:camera>
+            <a:lightRig rig="threePt" dir="t">
+              <a:rot lat="0" lon="0" rev="1200000"/>
+            </a:lightRig>
+          </a:scene3d>
+          <a:sp3d>
+            <a:bevelT w="63500" h="25400"/>
+          </a:sp3d>
+        </a:effectStyle>
+      </a:effectStyleLst>
+      <a:bgFillStyleLst>
+        <a:solidFill>
+          <a:schemeClr val="phClr"/>
+        </a:solidFill>
+        <a:gradFill rotWithShape="1">
+          <a:gsLst>
+            <a:gs pos="0">
+              <a:schemeClr val="phClr">
+                <a:tint val="40000"/>
+                <a:satMod val="350000"/>
+              </a:schemeClr>
+            </a:gs>
+            <a:gs pos="40000">
+              <a:schemeClr val="phClr">
+                <a:tint val="45000"/>
+                <a:shade val="99000"/>
+                <a:satMod val="350000"/>
+              </a:schemeClr>
+            </a:gs>
+            <a:gs pos="100000">
+              <a:schemeClr val="phClr">
+                <a:shade val="20000"/>
+                <a:satMod val="255000"/>
+              </a:schemeClr>
+            </a:gs>
+          </a:gsLst>
+          <a:path path="circle">
+            <a:fillToRect l="50000" t="-80000" r="50000" b="180000"/>
+          </a:path>
+        </a:gradFill>
+        <a:gradFill rotWithShape="1">
+          <a:gsLst>
+            <a:gs pos="0">
+              <a:schemeClr val="phClr">
+                <a:tint val="80000"/>
+                <a:satMod val="300000"/>
+              </a:schemeClr>
+            </a:gs>
+            <a:gs pos="100000">
+              <a:schemeClr val="phClr">
+                <a:shade val="30000"/>
+                <a:satMod val="200000"/>
+              </a:schemeClr>
+            </a:gs>
+          </a:gsLst>
+          <a:path path="circle">
+            <a:fillToRect l="50000" t="50000" r="50000" b="50000"/>
+          </a:path>
+        </a:gradFill>
+      </a:bgFillStyleLst>
+    </a:fmtScheme>
+  </a:themeElements>
+  <a:objectDefaults>
+    <a:spDef>
+      <a:spPr/>
+      <a:bodyPr/>
+      <a:lstStyle/>
+      <a:style>
+        <a:lnRef idx="1">
+          <a:schemeClr val="accent1"/>
+        </a:lnRef>
+        <a:fillRef idx="3">
+          <a:schemeClr val="accent1"/>
+        </a:fillRef>
+        <a:effectRef idx="2">
+          <a:schemeClr val="accent1"/>
+        </a:effectRef>
+        <a:fontRef idx="minor">
+          <a:schemeClr val="lt1"/>
+        </a:fontRef>
+      </a:style>
+    </a:spDef>
+    <a:lnDef>
+      <a:spPr/>
+      <a:bodyPr/>
+      <a:lstStyle/>
+      <a:style>
+        <a:lnRef idx="2">
+          <a:schemeClr val="accent1"/>
+        </a:lnRef>
+        <a:fillRef idx="0">
+          <a:schemeClr val="accent1"/>
+        </a:fillRef>
+        <a:effectRef idx="1">
+          <a:schemeClr val="accent1"/>
+        </a:effectRef>
+        <a:fontRef idx="minor">
+          <a:schemeClr val="tx1"/>
+        </a:fontRef>
+      </a:style>
+    </a:lnDef>
+  </a:objectDefaults>
+  <a:extraClrSchemeLst/>
+</a:theme>
 </file>